--- a/docs/presentation/kosmo-deck.pptx
+++ b/docs/presentation/kosmo-deck.pptx
@@ -13626,20 +13626,20 @@
         </p:nvSpPr>
         <p:spPr>
           <a:xfrm>
-            <a:off x="2595433" y="3472937"/>
-            <a:ext cx="1737360" cy="219456"/>
-          </a:xfrm>
-          <a:prstGeom prst="rect">
-            <a:avLst/>
-          </a:prstGeom>
-          <a:noFill/>
-          <a:ln/>
-        </p:spPr>
-        <p:txBody>
-          <a:bodyPr wrap="square" lIns="0" tIns="0" rIns="0" bIns="0" rtlCol="0" anchor="ctr"/>
-          <a:lstStyle/>
-          <a:p>
-            <a:pPr indent="0" marL="0">
+            <a:off x="2595433" y="4003289"/>
+            <a:ext cx="1133856" cy="201168"/>
+          </a:xfrm>
+          <a:prstGeom prst="rect">
+            <a:avLst/>
+          </a:prstGeom>
+          <a:noFill/>
+          <a:ln/>
+        </p:spPr>
+        <p:txBody>
+          <a:bodyPr wrap="square" lIns="0" tIns="0" rIns="0" bIns="0" rtlCol="0" anchor="ctr"/>
+          <a:lstStyle/>
+          <a:p>
+            <a:pPr algn="l" indent="0" marL="0">
               <a:buNone/>
             </a:pPr>
             <a:r>
@@ -13690,20 +13690,20 @@
         </p:nvSpPr>
         <p:spPr>
           <a:xfrm>
-            <a:off x="3621024" y="3011622"/>
-            <a:ext cx="1737360" cy="219456"/>
-          </a:xfrm>
-          <a:prstGeom prst="rect">
-            <a:avLst/>
-          </a:prstGeom>
-          <a:noFill/>
-          <a:ln/>
-        </p:spPr>
-        <p:txBody>
-          <a:bodyPr wrap="square" lIns="0" tIns="0" rIns="0" bIns="0" rtlCol="0" anchor="ctr"/>
-          <a:lstStyle/>
-          <a:p>
-            <a:pPr indent="0" marL="0">
+            <a:off x="2560320" y="3002478"/>
+            <a:ext cx="731520" cy="201168"/>
+          </a:xfrm>
+          <a:prstGeom prst="rect">
+            <a:avLst/>
+          </a:prstGeom>
+          <a:noFill/>
+          <a:ln/>
+        </p:spPr>
+        <p:txBody>
+          <a:bodyPr wrap="square" lIns="0" tIns="0" rIns="0" bIns="0" rtlCol="0" anchor="ctr"/>
+          <a:lstStyle/>
+          <a:p>
+            <a:pPr algn="r" indent="0" marL="0">
               <a:buNone/>
             </a:pPr>
             <a:r>

--- a/docs/presentation/kosmo-deck.pptx
+++ b/docs/presentation/kosmo-deck.pptx
@@ -1797,7 +1797,7 @@
         </p:nvSpPr>
         <p:spPr>
           <a:xfrm>
-            <a:off x="658368" y="1298448"/>
+            <a:off x="658368" y="1371600"/>
             <a:ext cx="8595360" cy="2286000"/>
           </a:xfrm>
           <a:prstGeom prst="rect">
@@ -1853,52 +1853,13 @@
       </p:sp>
       <p:sp>
         <p:nvSpPr>
-          <p:cNvPr id="4" name="Text 1"/>
-          <p:cNvSpPr txBox="1"/>
-          <p:nvPr/>
-        </p:nvSpPr>
-        <p:spPr>
-          <a:xfrm>
-            <a:off x="658368" y="3675888"/>
-            <a:ext cx="6400800" cy="365760"/>
-          </a:xfrm>
-          <a:prstGeom prst="rect">
-            <a:avLst/>
-          </a:prstGeom>
-          <a:noFill/>
-          <a:ln/>
-        </p:spPr>
-        <p:txBody>
-          <a:bodyPr wrap="square" lIns="0" tIns="0" rIns="0" bIns="0" rtlCol="0" anchor="ctr"/>
-          <a:lstStyle/>
-          <a:p>
-            <a:pPr indent="0" marL="0">
-              <a:buNone/>
-            </a:pPr>
-            <a:r>
-              <a:rPr lang="en-US" sz="1600" dirty="0">
-                <a:solidFill>
-                  <a:srgbClr val="3E5147"/>
-                </a:solidFill>
-                <a:latin typeface="Montserrat" pitchFamily="34" charset="0"/>
-                <a:ea typeface="Montserrat" pitchFamily="34" charset="-122"/>
-                <a:cs typeface="Montserrat" pitchFamily="34" charset="-120"/>
-              </a:rPr>
-              <a:t>Четыре работающих сервиса для региона</a:t>
-            </a:r>
-            <a:endParaRPr lang="en-US" sz="1600" dirty="0"/>
-          </a:p>
-        </p:txBody>
-      </p:sp>
-      <p:sp>
-        <p:nvSpPr>
-          <p:cNvPr id="5" name="Shape 2"/>
-          <p:cNvSpPr/>
-          <p:nvPr/>
-        </p:nvSpPr>
-        <p:spPr>
-          <a:xfrm>
-            <a:off x="658368" y="4315968"/>
+          <p:cNvPr id="4" name="Shape 1"/>
+          <p:cNvSpPr/>
+          <p:nvPr/>
+        </p:nvSpPr>
+        <p:spPr>
+          <a:xfrm>
+            <a:off x="658368" y="3547872"/>
             <a:ext cx="1517904" cy="475488"/>
           </a:xfrm>
           <a:prstGeom prst="roundRect">
@@ -1926,13 +1887,13 @@
       </p:sp>
       <p:sp>
         <p:nvSpPr>
-          <p:cNvPr id="6" name="Text 3"/>
-          <p:cNvSpPr txBox="1"/>
-          <p:nvPr/>
-        </p:nvSpPr>
-        <p:spPr>
-          <a:xfrm>
-            <a:off x="786384" y="4315968"/>
+          <p:cNvPr id="5" name="Text 2"/>
+          <p:cNvSpPr txBox="1"/>
+          <p:nvPr/>
+        </p:nvSpPr>
+        <p:spPr>
+          <a:xfrm>
+            <a:off x="786384" y="3547872"/>
             <a:ext cx="1261872" cy="475488"/>
           </a:xfrm>
           <a:prstGeom prst="rect">
@@ -1965,13 +1926,13 @@
       </p:sp>
       <p:sp>
         <p:nvSpPr>
-          <p:cNvPr id="7" name="Shape 4"/>
-          <p:cNvSpPr/>
-          <p:nvPr/>
-        </p:nvSpPr>
-        <p:spPr>
-          <a:xfrm>
-            <a:off x="2322576" y="4315968"/>
+          <p:cNvPr id="6" name="Shape 3"/>
+          <p:cNvSpPr/>
+          <p:nvPr/>
+        </p:nvSpPr>
+        <p:spPr>
+          <a:xfrm>
+            <a:off x="2322576" y="3547872"/>
             <a:ext cx="1517904" cy="475488"/>
           </a:xfrm>
           <a:prstGeom prst="roundRect">
@@ -1999,13 +1960,13 @@
       </p:sp>
       <p:sp>
         <p:nvSpPr>
-          <p:cNvPr id="8" name="Text 5"/>
-          <p:cNvSpPr txBox="1"/>
-          <p:nvPr/>
-        </p:nvSpPr>
-        <p:spPr>
-          <a:xfrm>
-            <a:off x="2450592" y="4315968"/>
+          <p:cNvPr id="7" name="Text 4"/>
+          <p:cNvSpPr txBox="1"/>
+          <p:nvPr/>
+        </p:nvSpPr>
+        <p:spPr>
+          <a:xfrm>
+            <a:off x="2450592" y="3547872"/>
             <a:ext cx="1261872" cy="475488"/>
           </a:xfrm>
           <a:prstGeom prst="rect">
@@ -2038,13 +1999,13 @@
       </p:sp>
       <p:sp>
         <p:nvSpPr>
-          <p:cNvPr id="9" name="Shape 6"/>
-          <p:cNvSpPr/>
-          <p:nvPr/>
-        </p:nvSpPr>
-        <p:spPr>
-          <a:xfrm>
-            <a:off x="3986784" y="4315968"/>
+          <p:cNvPr id="8" name="Shape 5"/>
+          <p:cNvSpPr/>
+          <p:nvPr/>
+        </p:nvSpPr>
+        <p:spPr>
+          <a:xfrm>
+            <a:off x="3986784" y="3547872"/>
             <a:ext cx="1517904" cy="475488"/>
           </a:xfrm>
           <a:prstGeom prst="roundRect">
@@ -2072,13 +2033,13 @@
       </p:sp>
       <p:sp>
         <p:nvSpPr>
-          <p:cNvPr id="10" name="Text 7"/>
-          <p:cNvSpPr txBox="1"/>
-          <p:nvPr/>
-        </p:nvSpPr>
-        <p:spPr>
-          <a:xfrm>
-            <a:off x="4114800" y="4315968"/>
+          <p:cNvPr id="9" name="Text 6"/>
+          <p:cNvSpPr txBox="1"/>
+          <p:nvPr/>
+        </p:nvSpPr>
+        <p:spPr>
+          <a:xfrm>
+            <a:off x="4114800" y="3547872"/>
             <a:ext cx="1261872" cy="475488"/>
           </a:xfrm>
           <a:prstGeom prst="rect">
@@ -2111,13 +2072,13 @@
       </p:sp>
       <p:sp>
         <p:nvSpPr>
-          <p:cNvPr id="11" name="Shape 8"/>
-          <p:cNvSpPr/>
-          <p:nvPr/>
-        </p:nvSpPr>
-        <p:spPr>
-          <a:xfrm>
-            <a:off x="5650992" y="4315968"/>
+          <p:cNvPr id="10" name="Shape 7"/>
+          <p:cNvSpPr/>
+          <p:nvPr/>
+        </p:nvSpPr>
+        <p:spPr>
+          <a:xfrm>
+            <a:off x="5650992" y="3547872"/>
             <a:ext cx="1517904" cy="475488"/>
           </a:xfrm>
           <a:prstGeom prst="roundRect">
@@ -2145,13 +2106,13 @@
       </p:sp>
       <p:sp>
         <p:nvSpPr>
-          <p:cNvPr id="12" name="Text 9"/>
-          <p:cNvSpPr txBox="1"/>
-          <p:nvPr/>
-        </p:nvSpPr>
-        <p:spPr>
-          <a:xfrm>
-            <a:off x="5779008" y="4315968"/>
+          <p:cNvPr id="11" name="Text 8"/>
+          <p:cNvSpPr txBox="1"/>
+          <p:nvPr/>
+        </p:nvSpPr>
+        <p:spPr>
+          <a:xfrm>
+            <a:off x="5779008" y="3547872"/>
             <a:ext cx="1261872" cy="475488"/>
           </a:xfrm>
           <a:prstGeom prst="rect">
@@ -2184,13 +2145,13 @@
       </p:sp>
       <p:sp>
         <p:nvSpPr>
-          <p:cNvPr id="13" name="Shape 10"/>
-          <p:cNvSpPr/>
-          <p:nvPr/>
-        </p:nvSpPr>
-        <p:spPr>
-          <a:xfrm>
-            <a:off x="658368" y="5029200"/>
+          <p:cNvPr id="12" name="Shape 9"/>
+          <p:cNvSpPr/>
+          <p:nvPr/>
+        </p:nvSpPr>
+        <p:spPr>
+          <a:xfrm>
+            <a:off x="658368" y="4846320"/>
             <a:ext cx="2615184" cy="1005840"/>
           </a:xfrm>
           <a:prstGeom prst="roundRect">
@@ -2218,14 +2179,53 @@
       </p:sp>
       <p:sp>
         <p:nvSpPr>
+          <p:cNvPr id="13" name="Text 10"/>
+          <p:cNvSpPr txBox="1"/>
+          <p:nvPr/>
+        </p:nvSpPr>
+        <p:spPr>
+          <a:xfrm>
+            <a:off x="896112" y="4974336"/>
+            <a:ext cx="2194560" cy="457200"/>
+          </a:xfrm>
+          <a:prstGeom prst="rect">
+            <a:avLst/>
+          </a:prstGeom>
+          <a:noFill/>
+          <a:ln/>
+        </p:spPr>
+        <p:txBody>
+          <a:bodyPr wrap="square" lIns="0" tIns="0" rIns="0" bIns="0" rtlCol="0" anchor="ctr"/>
+          <a:lstStyle/>
+          <a:p>
+            <a:pPr indent="0" marL="0">
+              <a:buNone/>
+            </a:pPr>
+            <a:r>
+              <a:rPr lang="en-US" sz="2400" b="1" dirty="0">
+                <a:solidFill>
+                  <a:srgbClr val="0E1F16"/>
+                </a:solidFill>
+                <a:latin typeface="Montserrat" pitchFamily="34" charset="0"/>
+                <a:ea typeface="Montserrat" pitchFamily="34" charset="-122"/>
+                <a:cs typeface="Montserrat" pitchFamily="34" charset="-120"/>
+              </a:rPr>
+              <a:t>1 140</a:t>
+            </a:r>
+            <a:endParaRPr lang="en-US" sz="2400" dirty="0"/>
+          </a:p>
+        </p:txBody>
+      </p:sp>
+      <p:sp>
+        <p:nvSpPr>
           <p:cNvPr id="14" name="Text 11"/>
           <p:cNvSpPr txBox="1"/>
           <p:nvPr/>
         </p:nvSpPr>
         <p:spPr>
           <a:xfrm>
-            <a:off x="896112" y="5157216"/>
-            <a:ext cx="2194560" cy="457200"/>
+            <a:off x="896112" y="5413248"/>
+            <a:ext cx="2194560" cy="274320"/>
           </a:xfrm>
           <a:prstGeom prst="rect">
             <a:avLst/>
@@ -2241,45 +2241,6 @@
               <a:buNone/>
             </a:pPr>
             <a:r>
-              <a:rPr lang="en-US" sz="2400" b="1" dirty="0">
-                <a:solidFill>
-                  <a:srgbClr val="0E1F16"/>
-                </a:solidFill>
-                <a:latin typeface="Montserrat" pitchFamily="34" charset="0"/>
-                <a:ea typeface="Montserrat" pitchFamily="34" charset="-122"/>
-                <a:cs typeface="Montserrat" pitchFamily="34" charset="-120"/>
-              </a:rPr>
-              <a:t>1 140</a:t>
-            </a:r>
-            <a:endParaRPr lang="en-US" sz="2400" dirty="0"/>
-          </a:p>
-        </p:txBody>
-      </p:sp>
-      <p:sp>
-        <p:nvSpPr>
-          <p:cNvPr id="15" name="Text 12"/>
-          <p:cNvSpPr txBox="1"/>
-          <p:nvPr/>
-        </p:nvSpPr>
-        <p:spPr>
-          <a:xfrm>
-            <a:off x="896112" y="5596128"/>
-            <a:ext cx="2194560" cy="274320"/>
-          </a:xfrm>
-          <a:prstGeom prst="rect">
-            <a:avLst/>
-          </a:prstGeom>
-          <a:noFill/>
-          <a:ln/>
-        </p:spPr>
-        <p:txBody>
-          <a:bodyPr wrap="square" lIns="0" tIns="0" rIns="0" bIns="0" rtlCol="0" anchor="ctr"/>
-          <a:lstStyle/>
-          <a:p>
-            <a:pPr indent="0" marL="0">
-              <a:buNone/>
-            </a:pPr>
-            <a:r>
               <a:rPr lang="en-US" sz="1050" dirty="0">
                 <a:solidFill>
                   <a:srgbClr val="3E5147"/>
@@ -2296,13 +2257,13 @@
       </p:sp>
       <p:sp>
         <p:nvSpPr>
-          <p:cNvPr id="16" name="Shape 13"/>
-          <p:cNvSpPr/>
-          <p:nvPr/>
-        </p:nvSpPr>
-        <p:spPr>
-          <a:xfrm>
-            <a:off x="3456432" y="5029200"/>
+          <p:cNvPr id="15" name="Shape 12"/>
+          <p:cNvSpPr/>
+          <p:nvPr/>
+        </p:nvSpPr>
+        <p:spPr>
+          <a:xfrm>
+            <a:off x="3456432" y="4846320"/>
             <a:ext cx="2615184" cy="1005840"/>
           </a:xfrm>
           <a:prstGeom prst="roundRect">
@@ -2330,14 +2291,53 @@
       </p:sp>
       <p:sp>
         <p:nvSpPr>
+          <p:cNvPr id="16" name="Text 13"/>
+          <p:cNvSpPr txBox="1"/>
+          <p:nvPr/>
+        </p:nvSpPr>
+        <p:spPr>
+          <a:xfrm>
+            <a:off x="3694176" y="4974336"/>
+            <a:ext cx="2194560" cy="457200"/>
+          </a:xfrm>
+          <a:prstGeom prst="rect">
+            <a:avLst/>
+          </a:prstGeom>
+          <a:noFill/>
+          <a:ln/>
+        </p:spPr>
+        <p:txBody>
+          <a:bodyPr wrap="square" lIns="0" tIns="0" rIns="0" bIns="0" rtlCol="0" anchor="ctr"/>
+          <a:lstStyle/>
+          <a:p>
+            <a:pPr indent="0" marL="0">
+              <a:buNone/>
+            </a:pPr>
+            <a:r>
+              <a:rPr lang="en-US" sz="2400" b="1" dirty="0">
+                <a:solidFill>
+                  <a:srgbClr val="0E1F16"/>
+                </a:solidFill>
+                <a:latin typeface="Montserrat" pitchFamily="34" charset="0"/>
+                <a:ea typeface="Montserrat" pitchFamily="34" charset="-122"/>
+                <a:cs typeface="Montserrat" pitchFamily="34" charset="-120"/>
+              </a:rPr>
+              <a:t>1 289</a:t>
+            </a:r>
+            <a:endParaRPr lang="en-US" sz="2400" dirty="0"/>
+          </a:p>
+        </p:txBody>
+      </p:sp>
+      <p:sp>
+        <p:nvSpPr>
           <p:cNvPr id="17" name="Text 14"/>
           <p:cNvSpPr txBox="1"/>
           <p:nvPr/>
         </p:nvSpPr>
         <p:spPr>
           <a:xfrm>
-            <a:off x="3694176" y="5157216"/>
-            <a:ext cx="2194560" cy="457200"/>
+            <a:off x="3694176" y="5413248"/>
+            <a:ext cx="2194560" cy="274320"/>
           </a:xfrm>
           <a:prstGeom prst="rect">
             <a:avLst/>
@@ -2353,45 +2353,6 @@
               <a:buNone/>
             </a:pPr>
             <a:r>
-              <a:rPr lang="en-US" sz="2400" b="1" dirty="0">
-                <a:solidFill>
-                  <a:srgbClr val="0E1F16"/>
-                </a:solidFill>
-                <a:latin typeface="Montserrat" pitchFamily="34" charset="0"/>
-                <a:ea typeface="Montserrat" pitchFamily="34" charset="-122"/>
-                <a:cs typeface="Montserrat" pitchFamily="34" charset="-120"/>
-              </a:rPr>
-              <a:t>1 289</a:t>
-            </a:r>
-            <a:endParaRPr lang="en-US" sz="2400" dirty="0"/>
-          </a:p>
-        </p:txBody>
-      </p:sp>
-      <p:sp>
-        <p:nvSpPr>
-          <p:cNvPr id="18" name="Text 15"/>
-          <p:cNvSpPr txBox="1"/>
-          <p:nvPr/>
-        </p:nvSpPr>
-        <p:spPr>
-          <a:xfrm>
-            <a:off x="3694176" y="5596128"/>
-            <a:ext cx="2194560" cy="274320"/>
-          </a:xfrm>
-          <a:prstGeom prst="rect">
-            <a:avLst/>
-          </a:prstGeom>
-          <a:noFill/>
-          <a:ln/>
-        </p:spPr>
-        <p:txBody>
-          <a:bodyPr wrap="square" lIns="0" tIns="0" rIns="0" bIns="0" rtlCol="0" anchor="ctr"/>
-          <a:lstStyle/>
-          <a:p>
-            <a:pPr indent="0" marL="0">
-              <a:buNone/>
-            </a:pPr>
-            <a:r>
               <a:rPr lang="en-US" sz="1050" dirty="0">
                 <a:solidFill>
                   <a:srgbClr val="3E5147"/>
@@ -2408,13 +2369,13 @@
       </p:sp>
       <p:sp>
         <p:nvSpPr>
-          <p:cNvPr id="19" name="Shape 16"/>
-          <p:cNvSpPr/>
-          <p:nvPr/>
-        </p:nvSpPr>
-        <p:spPr>
-          <a:xfrm>
-            <a:off x="6254496" y="5029200"/>
+          <p:cNvPr id="18" name="Shape 15"/>
+          <p:cNvSpPr/>
+          <p:nvPr/>
+        </p:nvSpPr>
+        <p:spPr>
+          <a:xfrm>
+            <a:off x="6254496" y="4846320"/>
             <a:ext cx="2615184" cy="1005840"/>
           </a:xfrm>
           <a:prstGeom prst="roundRect">
@@ -2442,14 +2403,53 @@
       </p:sp>
       <p:sp>
         <p:nvSpPr>
+          <p:cNvPr id="19" name="Text 16"/>
+          <p:cNvSpPr txBox="1"/>
+          <p:nvPr/>
+        </p:nvSpPr>
+        <p:spPr>
+          <a:xfrm>
+            <a:off x="6492240" y="4974336"/>
+            <a:ext cx="2194560" cy="457200"/>
+          </a:xfrm>
+          <a:prstGeom prst="rect">
+            <a:avLst/>
+          </a:prstGeom>
+          <a:noFill/>
+          <a:ln/>
+        </p:spPr>
+        <p:txBody>
+          <a:bodyPr wrap="square" lIns="0" tIns="0" rIns="0" bIns="0" rtlCol="0" anchor="ctr"/>
+          <a:lstStyle/>
+          <a:p>
+            <a:pPr indent="0" marL="0">
+              <a:buNone/>
+            </a:pPr>
+            <a:r>
+              <a:rPr lang="en-US" sz="2400" b="1" dirty="0">
+                <a:solidFill>
+                  <a:srgbClr val="0E1F16"/>
+                </a:solidFill>
+                <a:latin typeface="Montserrat" pitchFamily="34" charset="0"/>
+                <a:ea typeface="Montserrat" pitchFamily="34" charset="-122"/>
+                <a:cs typeface="Montserrat" pitchFamily="34" charset="-120"/>
+              </a:rPr>
+              <a:t>370,5</a:t>
+            </a:r>
+            <a:endParaRPr lang="en-US" sz="2400" dirty="0"/>
+          </a:p>
+        </p:txBody>
+      </p:sp>
+      <p:sp>
+        <p:nvSpPr>
           <p:cNvPr id="20" name="Text 17"/>
           <p:cNvSpPr txBox="1"/>
           <p:nvPr/>
         </p:nvSpPr>
         <p:spPr>
           <a:xfrm>
-            <a:off x="6492240" y="5157216"/>
-            <a:ext cx="2194560" cy="457200"/>
+            <a:off x="6492240" y="5413248"/>
+            <a:ext cx="2194560" cy="274320"/>
           </a:xfrm>
           <a:prstGeom prst="rect">
             <a:avLst/>
@@ -2465,45 +2465,6 @@
               <a:buNone/>
             </a:pPr>
             <a:r>
-              <a:rPr lang="en-US" sz="2400" b="1" dirty="0">
-                <a:solidFill>
-                  <a:srgbClr val="0E1F16"/>
-                </a:solidFill>
-                <a:latin typeface="Montserrat" pitchFamily="34" charset="0"/>
-                <a:ea typeface="Montserrat" pitchFamily="34" charset="-122"/>
-                <a:cs typeface="Montserrat" pitchFamily="34" charset="-120"/>
-              </a:rPr>
-              <a:t>370,5</a:t>
-            </a:r>
-            <a:endParaRPr lang="en-US" sz="2400" dirty="0"/>
-          </a:p>
-        </p:txBody>
-      </p:sp>
-      <p:sp>
-        <p:nvSpPr>
-          <p:cNvPr id="21" name="Text 18"/>
-          <p:cNvSpPr txBox="1"/>
-          <p:nvPr/>
-        </p:nvSpPr>
-        <p:spPr>
-          <a:xfrm>
-            <a:off x="6492240" y="5596128"/>
-            <a:ext cx="2194560" cy="274320"/>
-          </a:xfrm>
-          <a:prstGeom prst="rect">
-            <a:avLst/>
-          </a:prstGeom>
-          <a:noFill/>
-          <a:ln/>
-        </p:spPr>
-        <p:txBody>
-          <a:bodyPr wrap="square" lIns="0" tIns="0" rIns="0" bIns="0" rtlCol="0" anchor="ctr"/>
-          <a:lstStyle/>
-          <a:p>
-            <a:pPr indent="0" marL="0">
-              <a:buNone/>
-            </a:pPr>
-            <a:r>
               <a:rPr lang="en-US" sz="1050" dirty="0">
                 <a:solidFill>
                   <a:srgbClr val="3E5147"/>
@@ -2520,13 +2481,13 @@
       </p:sp>
       <p:sp>
         <p:nvSpPr>
-          <p:cNvPr id="22" name="Shape 19"/>
-          <p:cNvSpPr/>
-          <p:nvPr/>
-        </p:nvSpPr>
-        <p:spPr>
-          <a:xfrm>
-            <a:off x="9052560" y="5029200"/>
+          <p:cNvPr id="21" name="Shape 18"/>
+          <p:cNvSpPr/>
+          <p:nvPr/>
+        </p:nvSpPr>
+        <p:spPr>
+          <a:xfrm>
+            <a:off x="9052560" y="4846320"/>
             <a:ext cx="2615184" cy="1005840"/>
           </a:xfrm>
           <a:prstGeom prst="roundRect">
@@ -2554,14 +2515,53 @@
       </p:sp>
       <p:sp>
         <p:nvSpPr>
+          <p:cNvPr id="22" name="Text 19"/>
+          <p:cNvSpPr txBox="1"/>
+          <p:nvPr/>
+        </p:nvSpPr>
+        <p:spPr>
+          <a:xfrm>
+            <a:off x="9290304" y="4974336"/>
+            <a:ext cx="2194560" cy="457200"/>
+          </a:xfrm>
+          <a:prstGeom prst="rect">
+            <a:avLst/>
+          </a:prstGeom>
+          <a:noFill/>
+          <a:ln/>
+        </p:spPr>
+        <p:txBody>
+          <a:bodyPr wrap="square" lIns="0" tIns="0" rIns="0" bIns="0" rtlCol="0" anchor="ctr"/>
+          <a:lstStyle/>
+          <a:p>
+            <a:pPr indent="0" marL="0">
+              <a:buNone/>
+            </a:pPr>
+            <a:r>
+              <a:rPr lang="en-US" sz="2400" b="1" dirty="0">
+                <a:solidFill>
+                  <a:srgbClr val="0E1F16"/>
+                </a:solidFill>
+                <a:latin typeface="Montserrat" pitchFamily="34" charset="0"/>
+                <a:ea typeface="Montserrat" pitchFamily="34" charset="-122"/>
+                <a:cs typeface="Montserrat" pitchFamily="34" charset="-120"/>
+              </a:rPr>
+              <a:t>40</a:t>
+            </a:r>
+            <a:endParaRPr lang="en-US" sz="2400" dirty="0"/>
+          </a:p>
+        </p:txBody>
+      </p:sp>
+      <p:sp>
+        <p:nvSpPr>
           <p:cNvPr id="23" name="Text 20"/>
           <p:cNvSpPr txBox="1"/>
           <p:nvPr/>
         </p:nvSpPr>
         <p:spPr>
           <a:xfrm>
-            <a:off x="9290304" y="5157216"/>
-            <a:ext cx="2194560" cy="457200"/>
+            <a:off x="9290304" y="5413248"/>
+            <a:ext cx="2194560" cy="274320"/>
           </a:xfrm>
           <a:prstGeom prst="rect">
             <a:avLst/>
@@ -2577,17 +2577,17 @@
               <a:buNone/>
             </a:pPr>
             <a:r>
-              <a:rPr lang="en-US" sz="2400" b="1" dirty="0">
-                <a:solidFill>
-                  <a:srgbClr val="0E1F16"/>
-                </a:solidFill>
-                <a:latin typeface="Montserrat" pitchFamily="34" charset="0"/>
-                <a:ea typeface="Montserrat" pitchFamily="34" charset="-122"/>
-                <a:cs typeface="Montserrat" pitchFamily="34" charset="-120"/>
-              </a:rPr>
-              <a:t>40</a:t>
-            </a:r>
-            <a:endParaRPr lang="en-US" sz="2400" dirty="0"/>
+              <a:rPr lang="en-US" sz="1050" dirty="0">
+                <a:solidFill>
+                  <a:srgbClr val="3E5147"/>
+                </a:solidFill>
+                <a:latin typeface="Montserrat" pitchFamily="34" charset="0"/>
+                <a:ea typeface="Montserrat" pitchFamily="34" charset="-122"/>
+                <a:cs typeface="Montserrat" pitchFamily="34" charset="-120"/>
+              </a:rPr>
+              <a:t>запас, млн ₽</a:t>
+            </a:r>
+            <a:endParaRPr lang="en-US" sz="1050" dirty="0"/>
           </a:p>
         </p:txBody>
       </p:sp>
@@ -2599,46 +2599,7 @@
         </p:nvSpPr>
         <p:spPr>
           <a:xfrm>
-            <a:off x="9290304" y="5596128"/>
-            <a:ext cx="2194560" cy="274320"/>
-          </a:xfrm>
-          <a:prstGeom prst="rect">
-            <a:avLst/>
-          </a:prstGeom>
-          <a:noFill/>
-          <a:ln/>
-        </p:spPr>
-        <p:txBody>
-          <a:bodyPr wrap="square" lIns="0" tIns="0" rIns="0" bIns="0" rtlCol="0" anchor="ctr"/>
-          <a:lstStyle/>
-          <a:p>
-            <a:pPr indent="0" marL="0">
-              <a:buNone/>
-            </a:pPr>
-            <a:r>
-              <a:rPr lang="en-US" sz="1050" dirty="0">
-                <a:solidFill>
-                  <a:srgbClr val="3E5147"/>
-                </a:solidFill>
-                <a:latin typeface="Montserrat" pitchFamily="34" charset="0"/>
-                <a:ea typeface="Montserrat" pitchFamily="34" charset="-122"/>
-                <a:cs typeface="Montserrat" pitchFamily="34" charset="-120"/>
-              </a:rPr>
-              <a:t>запас, млн ₽</a:t>
-            </a:r>
-            <a:endParaRPr lang="en-US" sz="1050" dirty="0"/>
-          </a:p>
-        </p:txBody>
-      </p:sp>
-      <p:sp>
-        <p:nvSpPr>
-          <p:cNvPr id="25" name="Text 22"/>
-          <p:cNvSpPr txBox="1"/>
-          <p:nvPr/>
-        </p:nvSpPr>
-        <p:spPr>
-          <a:xfrm>
-            <a:off x="658368" y="6236208"/>
+            <a:off x="658368" y="6144768"/>
             <a:ext cx="10515600" cy="274320"/>
           </a:xfrm>
           <a:prstGeom prst="rect">
@@ -2748,7 +2709,7 @@
         </p:nvSpPr>
         <p:spPr>
           <a:xfrm>
-            <a:off x="658368" y="548640"/>
+            <a:off x="658368" y="749808"/>
             <a:ext cx="10874959" cy="786384"/>
           </a:xfrm>
           <a:prstGeom prst="rect">
@@ -2781,46 +2742,7 @@
       </p:sp>
       <p:sp>
         <p:nvSpPr>
-          <p:cNvPr id="4" name="Text 2"/>
-          <p:cNvSpPr txBox="1"/>
-          <p:nvPr/>
-        </p:nvSpPr>
-        <p:spPr>
-          <a:xfrm>
-            <a:off x="658368" y="1335024"/>
-            <a:ext cx="9777679" cy="310896"/>
-          </a:xfrm>
-          <a:prstGeom prst="rect">
-            <a:avLst/>
-          </a:prstGeom>
-          <a:noFill/>
-          <a:ln/>
-        </p:spPr>
-        <p:txBody>
-          <a:bodyPr wrap="square" lIns="0" tIns="0" rIns="0" bIns="0" rtlCol="0" anchor="ctr"/>
-          <a:lstStyle/>
-          <a:p>
-            <a:pPr indent="0" marL="0">
-              <a:buNone/>
-            </a:pPr>
-            <a:r>
-              <a:rPr lang="en-US" sz="1350" dirty="0">
-                <a:solidFill>
-                  <a:srgbClr val="3E5147"/>
-                </a:solidFill>
-                <a:latin typeface="Montserrat" pitchFamily="34" charset="0"/>
-                <a:ea typeface="Montserrat" pitchFamily="34" charset="-122"/>
-                <a:cs typeface="Montserrat" pitchFamily="34" charset="-120"/>
-              </a:rPr>
-              <a:t>Заказчик держит стандарты и данные, конкуренция сохраняется.</a:t>
-            </a:r>
-            <a:endParaRPr lang="en-US" sz="1350" dirty="0"/>
-          </a:p>
-        </p:txBody>
-      </p:sp>
-      <p:sp>
-        <p:nvSpPr>
-          <p:cNvPr id="5" name="Shape 3"/>
+          <p:cNvPr id="4" name="Shape 2"/>
           <p:cNvSpPr/>
           <p:nvPr/>
         </p:nvSpPr>
@@ -2854,7 +2776,7 @@
       </p:sp>
       <p:sp>
         <p:nvSpPr>
-          <p:cNvPr id="6" name="Shape 4"/>
+          <p:cNvPr id="5" name="Shape 3"/>
           <p:cNvSpPr/>
           <p:nvPr/>
         </p:nvSpPr>
@@ -2879,7 +2801,7 @@
       </p:sp>
       <p:pic>
         <p:nvPicPr>
-          <p:cNvPr id="7" name="Image 0" descr="preencoded.png">    </p:cNvPr>
+          <p:cNvPr id="6" name="Image 0" descr="preencoded.png">    </p:cNvPr>
           <p:cNvPicPr>
             <a:picLocks noChangeAspect="1"/>
           </p:cNvPicPr>
@@ -2903,7 +2825,7 @@
       </p:pic>
       <p:sp>
         <p:nvSpPr>
-          <p:cNvPr id="8" name="Text 5"/>
+          <p:cNvPr id="7" name="Text 4"/>
           <p:cNvSpPr txBox="1"/>
           <p:nvPr/>
         </p:nvSpPr>
@@ -2942,7 +2864,7 @@
       </p:sp>
       <p:sp>
         <p:nvSpPr>
-          <p:cNvPr id="9" name="Text 6"/>
+          <p:cNvPr id="8" name="Text 5"/>
           <p:cNvSpPr txBox="1"/>
           <p:nvPr/>
         </p:nvSpPr>
@@ -2981,7 +2903,7 @@
       </p:sp>
       <p:sp>
         <p:nvSpPr>
-          <p:cNvPr id="10" name="Shape 7"/>
+          <p:cNvPr id="9" name="Shape 6"/>
           <p:cNvSpPr/>
           <p:nvPr/>
         </p:nvSpPr>
@@ -3006,7 +2928,7 @@
       </p:sp>
       <p:sp>
         <p:nvSpPr>
-          <p:cNvPr id="11" name="Shape 8"/>
+          <p:cNvPr id="10" name="Shape 7"/>
           <p:cNvSpPr/>
           <p:nvPr/>
         </p:nvSpPr>
@@ -3040,7 +2962,7 @@
       </p:sp>
       <p:sp>
         <p:nvSpPr>
-          <p:cNvPr id="12" name="Shape 9"/>
+          <p:cNvPr id="11" name="Shape 8"/>
           <p:cNvSpPr/>
           <p:nvPr/>
         </p:nvSpPr>
@@ -3065,7 +2987,7 @@
       </p:sp>
       <p:pic>
         <p:nvPicPr>
-          <p:cNvPr id="13" name="Image 1" descr="preencoded.png">    </p:cNvPr>
+          <p:cNvPr id="12" name="Image 1" descr="preencoded.png">    </p:cNvPr>
           <p:cNvPicPr>
             <a:picLocks noChangeAspect="1"/>
           </p:cNvPicPr>
@@ -3089,7 +3011,7 @@
       </p:pic>
       <p:sp>
         <p:nvSpPr>
-          <p:cNvPr id="14" name="Text 10"/>
+          <p:cNvPr id="13" name="Text 9"/>
           <p:cNvSpPr txBox="1"/>
           <p:nvPr/>
         </p:nvSpPr>
@@ -3128,7 +3050,7 @@
       </p:sp>
       <p:sp>
         <p:nvSpPr>
-          <p:cNvPr id="15" name="Text 11"/>
+          <p:cNvPr id="14" name="Text 10"/>
           <p:cNvSpPr txBox="1"/>
           <p:nvPr/>
         </p:nvSpPr>
@@ -3167,7 +3089,7 @@
       </p:sp>
       <p:sp>
         <p:nvSpPr>
-          <p:cNvPr id="16" name="Shape 12"/>
+          <p:cNvPr id="15" name="Shape 11"/>
           <p:cNvSpPr/>
           <p:nvPr/>
         </p:nvSpPr>
@@ -3192,7 +3114,7 @@
       </p:sp>
       <p:sp>
         <p:nvSpPr>
-          <p:cNvPr id="17" name="Shape 13"/>
+          <p:cNvPr id="16" name="Shape 12"/>
           <p:cNvSpPr/>
           <p:nvPr/>
         </p:nvSpPr>
@@ -3226,7 +3148,7 @@
       </p:sp>
       <p:sp>
         <p:nvSpPr>
-          <p:cNvPr id="18" name="Shape 14"/>
+          <p:cNvPr id="17" name="Shape 13"/>
           <p:cNvSpPr/>
           <p:nvPr/>
         </p:nvSpPr>
@@ -3251,7 +3173,7 @@
       </p:sp>
       <p:pic>
         <p:nvPicPr>
-          <p:cNvPr id="19" name="Image 2" descr="preencoded.png">    </p:cNvPr>
+          <p:cNvPr id="18" name="Image 2" descr="preencoded.png">    </p:cNvPr>
           <p:cNvPicPr>
             <a:picLocks noChangeAspect="1"/>
           </p:cNvPicPr>
@@ -3275,7 +3197,7 @@
       </p:pic>
       <p:sp>
         <p:nvSpPr>
-          <p:cNvPr id="20" name="Text 15"/>
+          <p:cNvPr id="19" name="Text 14"/>
           <p:cNvSpPr txBox="1"/>
           <p:nvPr/>
         </p:nvSpPr>
@@ -3314,7 +3236,7 @@
       </p:sp>
       <p:sp>
         <p:nvSpPr>
-          <p:cNvPr id="21" name="Text 16"/>
+          <p:cNvPr id="20" name="Text 15"/>
           <p:cNvSpPr txBox="1"/>
           <p:nvPr/>
         </p:nvSpPr>
@@ -3353,7 +3275,7 @@
       </p:sp>
       <p:sp>
         <p:nvSpPr>
-          <p:cNvPr id="22" name="Shape 17"/>
+          <p:cNvPr id="21" name="Shape 16"/>
           <p:cNvSpPr/>
           <p:nvPr/>
         </p:nvSpPr>
@@ -3387,7 +3309,7 @@
       </p:sp>
       <p:sp>
         <p:nvSpPr>
-          <p:cNvPr id="23" name="Shape 18"/>
+          <p:cNvPr id="22" name="Shape 17"/>
           <p:cNvSpPr/>
           <p:nvPr/>
         </p:nvSpPr>
@@ -3412,7 +3334,7 @@
       </p:sp>
       <p:pic>
         <p:nvPicPr>
-          <p:cNvPr id="24" name="Image 3" descr="preencoded.png">    </p:cNvPr>
+          <p:cNvPr id="23" name="Image 3" descr="preencoded.png">    </p:cNvPr>
           <p:cNvPicPr>
             <a:picLocks noChangeAspect="1"/>
           </p:cNvPicPr>
@@ -3436,7 +3358,7 @@
       </p:pic>
       <p:sp>
         <p:nvSpPr>
-          <p:cNvPr id="25" name="Text 19"/>
+          <p:cNvPr id="24" name="Text 18"/>
           <p:cNvSpPr txBox="1"/>
           <p:nvPr/>
         </p:nvSpPr>
@@ -3475,7 +3397,7 @@
       </p:sp>
       <p:sp>
         <p:nvSpPr>
-          <p:cNvPr id="26" name="Text 20"/>
+          <p:cNvPr id="25" name="Text 19"/>
           <p:cNvSpPr txBox="1"/>
           <p:nvPr/>
         </p:nvSpPr>
@@ -3514,7 +3436,7 @@
       </p:sp>
       <p:sp>
         <p:nvSpPr>
-          <p:cNvPr id="27" name="Shape 21"/>
+          <p:cNvPr id="26" name="Shape 20"/>
           <p:cNvSpPr/>
           <p:nvPr/>
         </p:nvSpPr>
@@ -3548,7 +3470,7 @@
       </p:sp>
       <p:sp>
         <p:nvSpPr>
-          <p:cNvPr id="28" name="Shape 22"/>
+          <p:cNvPr id="27" name="Shape 21"/>
           <p:cNvSpPr/>
           <p:nvPr/>
         </p:nvSpPr>
@@ -3573,7 +3495,7 @@
       </p:sp>
       <p:pic>
         <p:nvPicPr>
-          <p:cNvPr id="29" name="Image 4" descr="preencoded.png">    </p:cNvPr>
+          <p:cNvPr id="28" name="Image 4" descr="preencoded.png">    </p:cNvPr>
           <p:cNvPicPr>
             <a:picLocks noChangeAspect="1"/>
           </p:cNvPicPr>
@@ -3597,7 +3519,7 @@
       </p:pic>
       <p:sp>
         <p:nvSpPr>
-          <p:cNvPr id="30" name="Text 23"/>
+          <p:cNvPr id="29" name="Text 22"/>
           <p:cNvSpPr txBox="1"/>
           <p:nvPr/>
         </p:nvSpPr>
@@ -3636,7 +3558,7 @@
       </p:sp>
       <p:sp>
         <p:nvSpPr>
-          <p:cNvPr id="31" name="Shape 24"/>
+          <p:cNvPr id="30" name="Shape 23"/>
           <p:cNvSpPr/>
           <p:nvPr/>
         </p:nvSpPr>
@@ -3670,7 +3592,7 @@
       </p:sp>
       <p:sp>
         <p:nvSpPr>
-          <p:cNvPr id="32" name="Text 25"/>
+          <p:cNvPr id="31" name="Text 24"/>
           <p:cNvSpPr txBox="1"/>
           <p:nvPr/>
         </p:nvSpPr>
@@ -3709,7 +3631,7 @@
       </p:sp>
       <p:sp>
         <p:nvSpPr>
-          <p:cNvPr id="33" name="Shape 26"/>
+          <p:cNvPr id="32" name="Shape 25"/>
           <p:cNvSpPr/>
           <p:nvPr/>
         </p:nvSpPr>
@@ -3743,7 +3665,7 @@
       </p:sp>
       <p:sp>
         <p:nvSpPr>
-          <p:cNvPr id="34" name="Text 27"/>
+          <p:cNvPr id="33" name="Text 26"/>
           <p:cNvSpPr txBox="1"/>
           <p:nvPr/>
         </p:nvSpPr>
@@ -3782,7 +3704,7 @@
       </p:sp>
       <p:sp>
         <p:nvSpPr>
-          <p:cNvPr id="35" name="Shape 28"/>
+          <p:cNvPr id="34" name="Shape 27"/>
           <p:cNvSpPr/>
           <p:nvPr/>
         </p:nvSpPr>
@@ -3816,7 +3738,7 @@
       </p:sp>
       <p:sp>
         <p:nvSpPr>
-          <p:cNvPr id="36" name="Text 29"/>
+          <p:cNvPr id="35" name="Text 28"/>
           <p:cNvSpPr txBox="1"/>
           <p:nvPr/>
         </p:nvSpPr>
@@ -3855,7 +3777,7 @@
       </p:sp>
       <p:sp>
         <p:nvSpPr>
-          <p:cNvPr id="37" name="Shape 30"/>
+          <p:cNvPr id="36" name="Shape 29"/>
           <p:cNvSpPr/>
           <p:nvPr/>
         </p:nvSpPr>
@@ -3889,7 +3811,7 @@
       </p:sp>
       <p:sp>
         <p:nvSpPr>
-          <p:cNvPr id="38" name="Text 31"/>
+          <p:cNvPr id="37" name="Text 30"/>
           <p:cNvSpPr txBox="1"/>
           <p:nvPr/>
         </p:nvSpPr>
@@ -3928,7 +3850,7 @@
       </p:sp>
       <p:sp>
         <p:nvSpPr>
-          <p:cNvPr id="39" name="Shape 32"/>
+          <p:cNvPr id="38" name="Shape 31"/>
           <p:cNvSpPr/>
           <p:nvPr/>
         </p:nvSpPr>
@@ -3962,7 +3884,7 @@
       </p:sp>
       <p:sp>
         <p:nvSpPr>
-          <p:cNvPr id="40" name="Text 33"/>
+          <p:cNvPr id="39" name="Text 32"/>
           <p:cNvSpPr txBox="1"/>
           <p:nvPr/>
         </p:nvSpPr>
@@ -4001,7 +3923,7 @@
       </p:sp>
       <p:sp>
         <p:nvSpPr>
-          <p:cNvPr id="41" name="Shape 34"/>
+          <p:cNvPr id="40" name="Shape 33"/>
           <p:cNvSpPr/>
           <p:nvPr/>
         </p:nvSpPr>
@@ -4035,7 +3957,7 @@
       </p:sp>
       <p:sp>
         <p:nvSpPr>
-          <p:cNvPr id="42" name="Text 35"/>
+          <p:cNvPr id="41" name="Text 34"/>
           <p:cNvSpPr txBox="1"/>
           <p:nvPr/>
         </p:nvSpPr>
@@ -4074,7 +3996,7 @@
       </p:sp>
       <p:sp>
         <p:nvSpPr>
-          <p:cNvPr id="43" name="Shape 36"/>
+          <p:cNvPr id="42" name="Shape 35"/>
           <p:cNvSpPr/>
           <p:nvPr/>
         </p:nvSpPr>
@@ -4108,7 +4030,7 @@
       </p:sp>
       <p:sp>
         <p:nvSpPr>
-          <p:cNvPr id="44" name="Text 37"/>
+          <p:cNvPr id="43" name="Text 36"/>
           <p:cNvSpPr txBox="1"/>
           <p:nvPr/>
         </p:nvSpPr>
@@ -4147,7 +4069,7 @@
       </p:sp>
       <p:sp>
         <p:nvSpPr>
-          <p:cNvPr id="45" name="Shape 38"/>
+          <p:cNvPr id="44" name="Shape 37"/>
           <p:cNvSpPr/>
           <p:nvPr/>
         </p:nvSpPr>
@@ -4181,7 +4103,7 @@
       </p:sp>
       <p:sp>
         <p:nvSpPr>
-          <p:cNvPr id="46" name="Text 39"/>
+          <p:cNvPr id="45" name="Text 38"/>
           <p:cNvSpPr txBox="1"/>
           <p:nvPr/>
         </p:nvSpPr>
@@ -4297,7 +4219,7 @@
         </p:nvSpPr>
         <p:spPr>
           <a:xfrm>
-            <a:off x="658368" y="548640"/>
+            <a:off x="658368" y="749808"/>
             <a:ext cx="10874959" cy="786384"/>
           </a:xfrm>
           <a:prstGeom prst="rect">
@@ -4330,46 +4252,7 @@
       </p:sp>
       <p:sp>
         <p:nvSpPr>
-          <p:cNvPr id="4" name="Text 2"/>
-          <p:cNvSpPr txBox="1"/>
-          <p:nvPr/>
-        </p:nvSpPr>
-        <p:spPr>
-          <a:xfrm>
-            <a:off x="658368" y="1335024"/>
-            <a:ext cx="9777679" cy="310896"/>
-          </a:xfrm>
-          <a:prstGeom prst="rect">
-            <a:avLst/>
-          </a:prstGeom>
-          <a:noFill/>
-          <a:ln/>
-        </p:spPr>
-        <p:txBody>
-          <a:bodyPr wrap="square" lIns="0" tIns="0" rIns="0" bIns="0" rtlCol="0" anchor="ctr"/>
-          <a:lstStyle/>
-          <a:p>
-            <a:pPr indent="0" marL="0">
-              <a:buNone/>
-            </a:pPr>
-            <a:r>
-              <a:rPr lang="en-US" sz="1350" dirty="0">
-                <a:solidFill>
-                  <a:srgbClr val="3E5147"/>
-                </a:solidFill>
-                <a:latin typeface="Montserrat" pitchFamily="34" charset="0"/>
-                <a:ea typeface="Montserrat" pitchFamily="34" charset="-122"/>
-                <a:cs typeface="Montserrat" pitchFamily="34" charset="-120"/>
-              </a:rPr>
-              <a:t>Следующий регион получает готовую основу.</a:t>
-            </a:r>
-            <a:endParaRPr lang="en-US" sz="1350" dirty="0"/>
-          </a:p>
-        </p:txBody>
-      </p:sp>
-      <p:sp>
-        <p:nvSpPr>
-          <p:cNvPr id="5" name="Shape 3"/>
+          <p:cNvPr id="4" name="Shape 2"/>
           <p:cNvSpPr/>
           <p:nvPr/>
         </p:nvSpPr>
@@ -4403,7 +4286,7 @@
       </p:sp>
       <p:sp>
         <p:nvSpPr>
-          <p:cNvPr id="6" name="Shape 4"/>
+          <p:cNvPr id="5" name="Shape 3"/>
           <p:cNvSpPr/>
           <p:nvPr/>
         </p:nvSpPr>
@@ -4428,7 +4311,7 @@
       </p:sp>
       <p:pic>
         <p:nvPicPr>
-          <p:cNvPr id="7" name="Image 0" descr="preencoded.png">    </p:cNvPr>
+          <p:cNvPr id="6" name="Image 0" descr="preencoded.png">    </p:cNvPr>
           <p:cNvPicPr>
             <a:picLocks noChangeAspect="1"/>
           </p:cNvPicPr>
@@ -4452,7 +4335,7 @@
       </p:pic>
       <p:sp>
         <p:nvSpPr>
-          <p:cNvPr id="8" name="Text 5"/>
+          <p:cNvPr id="7" name="Text 4"/>
           <p:cNvSpPr txBox="1"/>
           <p:nvPr/>
         </p:nvSpPr>
@@ -4491,7 +4374,7 @@
       </p:sp>
       <p:sp>
         <p:nvSpPr>
-          <p:cNvPr id="9" name="Shape 6"/>
+          <p:cNvPr id="8" name="Shape 5"/>
           <p:cNvSpPr/>
           <p:nvPr/>
         </p:nvSpPr>
@@ -4516,7 +4399,7 @@
       </p:sp>
       <p:sp>
         <p:nvSpPr>
-          <p:cNvPr id="10" name="Text 7"/>
+          <p:cNvPr id="9" name="Text 6"/>
           <p:cNvSpPr txBox="1"/>
           <p:nvPr/>
         </p:nvSpPr>
@@ -4555,7 +4438,7 @@
       </p:sp>
       <p:sp>
         <p:nvSpPr>
-          <p:cNvPr id="11" name="Shape 8"/>
+          <p:cNvPr id="10" name="Shape 7"/>
           <p:cNvSpPr/>
           <p:nvPr/>
         </p:nvSpPr>
@@ -4580,7 +4463,7 @@
       </p:sp>
       <p:sp>
         <p:nvSpPr>
-          <p:cNvPr id="12" name="Text 9"/>
+          <p:cNvPr id="11" name="Text 8"/>
           <p:cNvSpPr txBox="1"/>
           <p:nvPr/>
         </p:nvSpPr>
@@ -4619,7 +4502,7 @@
       </p:sp>
       <p:sp>
         <p:nvSpPr>
-          <p:cNvPr id="13" name="Shape 10"/>
+          <p:cNvPr id="12" name="Shape 9"/>
           <p:cNvSpPr/>
           <p:nvPr/>
         </p:nvSpPr>
@@ -4644,7 +4527,7 @@
       </p:sp>
       <p:sp>
         <p:nvSpPr>
-          <p:cNvPr id="14" name="Text 11"/>
+          <p:cNvPr id="13" name="Text 10"/>
           <p:cNvSpPr txBox="1"/>
           <p:nvPr/>
         </p:nvSpPr>
@@ -4683,7 +4566,7 @@
       </p:sp>
       <p:sp>
         <p:nvSpPr>
-          <p:cNvPr id="15" name="Shape 12"/>
+          <p:cNvPr id="14" name="Shape 11"/>
           <p:cNvSpPr/>
           <p:nvPr/>
         </p:nvSpPr>
@@ -4708,7 +4591,7 @@
       </p:sp>
       <p:sp>
         <p:nvSpPr>
-          <p:cNvPr id="16" name="Text 13"/>
+          <p:cNvPr id="15" name="Text 12"/>
           <p:cNvSpPr txBox="1"/>
           <p:nvPr/>
         </p:nvSpPr>
@@ -4747,7 +4630,7 @@
       </p:sp>
       <p:sp>
         <p:nvSpPr>
-          <p:cNvPr id="17" name="Shape 14"/>
+          <p:cNvPr id="16" name="Shape 13"/>
           <p:cNvSpPr/>
           <p:nvPr/>
         </p:nvSpPr>
@@ -4772,7 +4655,7 @@
       </p:sp>
       <p:sp>
         <p:nvSpPr>
-          <p:cNvPr id="18" name="Text 15"/>
+          <p:cNvPr id="17" name="Text 14"/>
           <p:cNvSpPr txBox="1"/>
           <p:nvPr/>
         </p:nvSpPr>
@@ -4811,7 +4694,7 @@
       </p:sp>
       <p:sp>
         <p:nvSpPr>
-          <p:cNvPr id="19" name="Shape 16"/>
+          <p:cNvPr id="18" name="Shape 15"/>
           <p:cNvSpPr/>
           <p:nvPr/>
         </p:nvSpPr>
@@ -4836,7 +4719,7 @@
       </p:sp>
       <p:sp>
         <p:nvSpPr>
-          <p:cNvPr id="20" name="Text 17"/>
+          <p:cNvPr id="19" name="Text 16"/>
           <p:cNvSpPr txBox="1"/>
           <p:nvPr/>
         </p:nvSpPr>
@@ -4875,7 +4758,7 @@
       </p:sp>
       <p:sp>
         <p:nvSpPr>
-          <p:cNvPr id="21" name="Shape 18"/>
+          <p:cNvPr id="20" name="Shape 17"/>
           <p:cNvSpPr/>
           <p:nvPr/>
         </p:nvSpPr>
@@ -4909,7 +4792,7 @@
       </p:sp>
       <p:sp>
         <p:nvSpPr>
-          <p:cNvPr id="22" name="Shape 19"/>
+          <p:cNvPr id="21" name="Shape 18"/>
           <p:cNvSpPr/>
           <p:nvPr/>
         </p:nvSpPr>
@@ -4934,7 +4817,7 @@
       </p:sp>
       <p:pic>
         <p:nvPicPr>
-          <p:cNvPr id="23" name="Image 1" descr="preencoded.png">    </p:cNvPr>
+          <p:cNvPr id="22" name="Image 1" descr="preencoded.png">    </p:cNvPr>
           <p:cNvPicPr>
             <a:picLocks noChangeAspect="1"/>
           </p:cNvPicPr>
@@ -4958,7 +4841,7 @@
       </p:pic>
       <p:sp>
         <p:nvSpPr>
-          <p:cNvPr id="24" name="Text 20"/>
+          <p:cNvPr id="23" name="Text 19"/>
           <p:cNvSpPr txBox="1"/>
           <p:nvPr/>
         </p:nvSpPr>
@@ -4997,7 +4880,7 @@
       </p:sp>
       <p:sp>
         <p:nvSpPr>
-          <p:cNvPr id="25" name="Shape 21"/>
+          <p:cNvPr id="24" name="Shape 20"/>
           <p:cNvSpPr/>
           <p:nvPr/>
         </p:nvSpPr>
@@ -5022,7 +4905,7 @@
       </p:sp>
       <p:sp>
         <p:nvSpPr>
-          <p:cNvPr id="26" name="Text 22"/>
+          <p:cNvPr id="25" name="Text 21"/>
           <p:cNvSpPr txBox="1"/>
           <p:nvPr/>
         </p:nvSpPr>
@@ -5061,7 +4944,7 @@
       </p:sp>
       <p:sp>
         <p:nvSpPr>
-          <p:cNvPr id="27" name="Shape 23"/>
+          <p:cNvPr id="26" name="Shape 22"/>
           <p:cNvSpPr/>
           <p:nvPr/>
         </p:nvSpPr>
@@ -5086,7 +4969,7 @@
       </p:sp>
       <p:sp>
         <p:nvSpPr>
-          <p:cNvPr id="28" name="Text 24"/>
+          <p:cNvPr id="27" name="Text 23"/>
           <p:cNvSpPr txBox="1"/>
           <p:nvPr/>
         </p:nvSpPr>
@@ -5125,7 +5008,7 @@
       </p:sp>
       <p:sp>
         <p:nvSpPr>
-          <p:cNvPr id="29" name="Shape 25"/>
+          <p:cNvPr id="28" name="Shape 24"/>
           <p:cNvSpPr/>
           <p:nvPr/>
         </p:nvSpPr>
@@ -5150,7 +5033,7 @@
       </p:sp>
       <p:sp>
         <p:nvSpPr>
-          <p:cNvPr id="30" name="Text 26"/>
+          <p:cNvPr id="29" name="Text 25"/>
           <p:cNvSpPr txBox="1"/>
           <p:nvPr/>
         </p:nvSpPr>
@@ -5189,7 +5072,7 @@
       </p:sp>
       <p:sp>
         <p:nvSpPr>
-          <p:cNvPr id="31" name="Shape 27"/>
+          <p:cNvPr id="30" name="Shape 26"/>
           <p:cNvSpPr/>
           <p:nvPr/>
         </p:nvSpPr>
@@ -5214,7 +5097,7 @@
       </p:sp>
       <p:sp>
         <p:nvSpPr>
-          <p:cNvPr id="32" name="Text 28"/>
+          <p:cNvPr id="31" name="Text 27"/>
           <p:cNvSpPr txBox="1"/>
           <p:nvPr/>
         </p:nvSpPr>
@@ -5253,7 +5136,7 @@
       </p:sp>
       <p:sp>
         <p:nvSpPr>
-          <p:cNvPr id="33" name="Shape 29"/>
+          <p:cNvPr id="32" name="Shape 28"/>
           <p:cNvSpPr/>
           <p:nvPr/>
         </p:nvSpPr>
@@ -5287,7 +5170,7 @@
       </p:sp>
       <p:sp>
         <p:nvSpPr>
-          <p:cNvPr id="34" name="Text 30"/>
+          <p:cNvPr id="33" name="Text 29"/>
           <p:cNvSpPr txBox="1"/>
           <p:nvPr/>
         </p:nvSpPr>
@@ -5326,7 +5209,7 @@
       </p:sp>
       <p:sp>
         <p:nvSpPr>
-          <p:cNvPr id="35" name="Shape 31"/>
+          <p:cNvPr id="34" name="Shape 30"/>
           <p:cNvSpPr/>
           <p:nvPr/>
         </p:nvSpPr>
@@ -5351,7 +5234,7 @@
       </p:sp>
       <p:sp>
         <p:nvSpPr>
-          <p:cNvPr id="36" name="Shape 32"/>
+          <p:cNvPr id="35" name="Shape 31"/>
           <p:cNvSpPr/>
           <p:nvPr/>
         </p:nvSpPr>
@@ -5385,7 +5268,7 @@
       </p:sp>
       <p:sp>
         <p:nvSpPr>
-          <p:cNvPr id="37" name="Text 33"/>
+          <p:cNvPr id="36" name="Text 32"/>
           <p:cNvSpPr txBox="1"/>
           <p:nvPr/>
         </p:nvSpPr>
@@ -5424,7 +5307,7 @@
       </p:sp>
       <p:sp>
         <p:nvSpPr>
-          <p:cNvPr id="38" name="Shape 34"/>
+          <p:cNvPr id="37" name="Shape 33"/>
           <p:cNvSpPr/>
           <p:nvPr/>
         </p:nvSpPr>
@@ -5449,7 +5332,7 @@
       </p:sp>
       <p:sp>
         <p:nvSpPr>
-          <p:cNvPr id="39" name="Shape 35"/>
+          <p:cNvPr id="38" name="Shape 34"/>
           <p:cNvSpPr/>
           <p:nvPr/>
         </p:nvSpPr>
@@ -5483,7 +5366,7 @@
       </p:sp>
       <p:sp>
         <p:nvSpPr>
-          <p:cNvPr id="40" name="Text 36"/>
+          <p:cNvPr id="39" name="Text 35"/>
           <p:cNvSpPr txBox="1"/>
           <p:nvPr/>
         </p:nvSpPr>
@@ -5560,7 +5443,7 @@
         </p:nvSpPr>
         <p:spPr>
           <a:xfrm>
-            <a:off x="658368" y="548640"/>
+            <a:off x="658368" y="749808"/>
             <a:ext cx="10874959" cy="786384"/>
           </a:xfrm>
           <a:prstGeom prst="rect">
@@ -5593,46 +5476,7 @@
       </p:sp>
       <p:sp>
         <p:nvSpPr>
-          <p:cNvPr id="3" name="Text 1"/>
-          <p:cNvSpPr txBox="1"/>
-          <p:nvPr/>
-        </p:nvSpPr>
-        <p:spPr>
-          <a:xfrm>
-            <a:off x="658368" y="1335024"/>
-            <a:ext cx="9777679" cy="310896"/>
-          </a:xfrm>
-          <a:prstGeom prst="rect">
-            <a:avLst/>
-          </a:prstGeom>
-          <a:noFill/>
-          <a:ln/>
-        </p:spPr>
-        <p:txBody>
-          <a:bodyPr wrap="square" lIns="0" tIns="0" rIns="0" bIns="0" rtlCol="0" anchor="ctr"/>
-          <a:lstStyle/>
-          <a:p>
-            <a:pPr indent="0" marL="0">
-              <a:buNone/>
-            </a:pPr>
-            <a:r>
-              <a:rPr lang="en-US" sz="1350" dirty="0">
-                <a:solidFill>
-                  <a:srgbClr val="3E5147"/>
-                </a:solidFill>
-                <a:latin typeface="Montserrat" pitchFamily="34" charset="0"/>
-                <a:ea typeface="Montserrat" pitchFamily="34" charset="-122"/>
-                <a:cs typeface="Montserrat" pitchFamily="34" charset="-120"/>
-              </a:rPr>
-              <a:t>Космический сервис полезен там, где он заканчивается решением человека.</a:t>
-            </a:r>
-            <a:endParaRPr lang="en-US" sz="1350" dirty="0"/>
-          </a:p>
-        </p:txBody>
-      </p:sp>
-      <p:sp>
-        <p:nvSpPr>
-          <p:cNvPr id="4" name="Shape 2"/>
+          <p:cNvPr id="3" name="Shape 1"/>
           <p:cNvSpPr/>
           <p:nvPr/>
         </p:nvSpPr>
@@ -5666,7 +5510,7 @@
       </p:sp>
       <p:sp>
         <p:nvSpPr>
-          <p:cNvPr id="5" name="Shape 3"/>
+          <p:cNvPr id="4" name="Shape 2"/>
           <p:cNvSpPr/>
           <p:nvPr/>
         </p:nvSpPr>
@@ -5691,7 +5535,7 @@
       </p:sp>
       <p:pic>
         <p:nvPicPr>
-          <p:cNvPr id="6" name="Image 0" descr="preencoded.png">    </p:cNvPr>
+          <p:cNvPr id="5" name="Image 0" descr="preencoded.png">    </p:cNvPr>
           <p:cNvPicPr>
             <a:picLocks noChangeAspect="1"/>
           </p:cNvPicPr>
@@ -5715,7 +5559,7 @@
       </p:pic>
       <p:sp>
         <p:nvSpPr>
-          <p:cNvPr id="7" name="Text 4"/>
+          <p:cNvPr id="6" name="Text 3"/>
           <p:cNvSpPr txBox="1"/>
           <p:nvPr/>
         </p:nvSpPr>
@@ -5754,7 +5598,7 @@
       </p:sp>
       <p:sp>
         <p:nvSpPr>
-          <p:cNvPr id="8" name="Text 5"/>
+          <p:cNvPr id="7" name="Text 4"/>
           <p:cNvSpPr txBox="1"/>
           <p:nvPr/>
         </p:nvSpPr>
@@ -5793,7 +5637,7 @@
       </p:sp>
       <p:sp>
         <p:nvSpPr>
-          <p:cNvPr id="9" name="Shape 6"/>
+          <p:cNvPr id="8" name="Shape 5"/>
           <p:cNvSpPr/>
           <p:nvPr/>
         </p:nvSpPr>
@@ -5827,7 +5671,7 @@
       </p:sp>
       <p:sp>
         <p:nvSpPr>
-          <p:cNvPr id="10" name="Shape 7"/>
+          <p:cNvPr id="9" name="Shape 6"/>
           <p:cNvSpPr/>
           <p:nvPr/>
         </p:nvSpPr>
@@ -5852,7 +5696,7 @@
       </p:sp>
       <p:pic>
         <p:nvPicPr>
-          <p:cNvPr id="11" name="Image 1" descr="preencoded.png">    </p:cNvPr>
+          <p:cNvPr id="10" name="Image 1" descr="preencoded.png">    </p:cNvPr>
           <p:cNvPicPr>
             <a:picLocks noChangeAspect="1"/>
           </p:cNvPicPr>
@@ -5876,7 +5720,7 @@
       </p:pic>
       <p:sp>
         <p:nvSpPr>
-          <p:cNvPr id="12" name="Text 8"/>
+          <p:cNvPr id="11" name="Text 7"/>
           <p:cNvSpPr txBox="1"/>
           <p:nvPr/>
         </p:nvSpPr>
@@ -5915,7 +5759,7 @@
       </p:sp>
       <p:sp>
         <p:nvSpPr>
-          <p:cNvPr id="13" name="Text 9"/>
+          <p:cNvPr id="12" name="Text 8"/>
           <p:cNvSpPr txBox="1"/>
           <p:nvPr/>
         </p:nvSpPr>
@@ -5954,7 +5798,7 @@
       </p:sp>
       <p:sp>
         <p:nvSpPr>
-          <p:cNvPr id="14" name="Shape 10"/>
+          <p:cNvPr id="13" name="Shape 9"/>
           <p:cNvSpPr/>
           <p:nvPr/>
         </p:nvSpPr>
@@ -5988,7 +5832,7 @@
       </p:sp>
       <p:sp>
         <p:nvSpPr>
-          <p:cNvPr id="15" name="Shape 11"/>
+          <p:cNvPr id="14" name="Shape 10"/>
           <p:cNvSpPr/>
           <p:nvPr/>
         </p:nvSpPr>
@@ -6013,7 +5857,7 @@
       </p:sp>
       <p:pic>
         <p:nvPicPr>
-          <p:cNvPr id="16" name="Image 2" descr="preencoded.png">    </p:cNvPr>
+          <p:cNvPr id="15" name="Image 2" descr="preencoded.png">    </p:cNvPr>
           <p:cNvPicPr>
             <a:picLocks noChangeAspect="1"/>
           </p:cNvPicPr>
@@ -6037,7 +5881,7 @@
       </p:pic>
       <p:sp>
         <p:nvSpPr>
-          <p:cNvPr id="17" name="Text 12"/>
+          <p:cNvPr id="16" name="Text 11"/>
           <p:cNvSpPr txBox="1"/>
           <p:nvPr/>
         </p:nvSpPr>
@@ -6076,7 +5920,7 @@
       </p:sp>
       <p:sp>
         <p:nvSpPr>
-          <p:cNvPr id="18" name="Text 13"/>
+          <p:cNvPr id="17" name="Text 12"/>
           <p:cNvSpPr txBox="1"/>
           <p:nvPr/>
         </p:nvSpPr>
@@ -6115,7 +5959,7 @@
       </p:sp>
       <p:sp>
         <p:nvSpPr>
-          <p:cNvPr id="19" name="Shape 14"/>
+          <p:cNvPr id="18" name="Shape 13"/>
           <p:cNvSpPr/>
           <p:nvPr/>
         </p:nvSpPr>
@@ -6149,7 +5993,7 @@
       </p:sp>
       <p:sp>
         <p:nvSpPr>
-          <p:cNvPr id="20" name="Text 15"/>
+          <p:cNvPr id="19" name="Text 14"/>
           <p:cNvSpPr txBox="1"/>
           <p:nvPr/>
         </p:nvSpPr>
@@ -6188,7 +6032,7 @@
       </p:sp>
       <p:sp>
         <p:nvSpPr>
-          <p:cNvPr id="21" name="Text 16"/>
+          <p:cNvPr id="20" name="Text 15"/>
           <p:cNvSpPr txBox="1"/>
           <p:nvPr/>
         </p:nvSpPr>
@@ -6227,7 +6071,7 @@
       </p:sp>
       <p:sp>
         <p:nvSpPr>
-          <p:cNvPr id="22" name="Text 17"/>
+          <p:cNvPr id="21" name="Text 16"/>
           <p:cNvSpPr txBox="1"/>
           <p:nvPr/>
         </p:nvSpPr>
@@ -6304,7 +6148,7 @@
         </p:nvSpPr>
         <p:spPr>
           <a:xfrm>
-            <a:off x="658368" y="548640"/>
+            <a:off x="658368" y="749808"/>
             <a:ext cx="10874959" cy="786384"/>
           </a:xfrm>
           <a:prstGeom prst="rect">
@@ -6337,46 +6181,7 @@
       </p:sp>
       <p:sp>
         <p:nvSpPr>
-          <p:cNvPr id="3" name="Text 1"/>
-          <p:cNvSpPr txBox="1"/>
-          <p:nvPr/>
-        </p:nvSpPr>
-        <p:spPr>
-          <a:xfrm>
-            <a:off x="658368" y="1335024"/>
-            <a:ext cx="9777679" cy="310896"/>
-          </a:xfrm>
-          <a:prstGeom prst="rect">
-            <a:avLst/>
-          </a:prstGeom>
-          <a:noFill/>
-          <a:ln/>
-        </p:spPr>
-        <p:txBody>
-          <a:bodyPr wrap="square" lIns="0" tIns="0" rIns="0" bIns="0" rtlCol="0" anchor="ctr"/>
-          <a:lstStyle/>
-          <a:p>
-            <a:pPr indent="0" marL="0">
-              <a:buNone/>
-            </a:pPr>
-            <a:r>
-              <a:rPr lang="en-US" sz="1350" dirty="0">
-                <a:solidFill>
-                  <a:srgbClr val="3E5147"/>
-                </a:solidFill>
-                <a:latin typeface="Montserrat" pitchFamily="34" charset="0"/>
-                <a:ea typeface="Montserrat" pitchFamily="34" charset="-122"/>
-                <a:cs typeface="Montserrat" pitchFamily="34" charset="-120"/>
-              </a:rPr>
-              <a:t>Каждый заканчивается конкретным действием пользователя.</a:t>
-            </a:r>
-            <a:endParaRPr lang="en-US" sz="1350" dirty="0"/>
-          </a:p>
-        </p:txBody>
-      </p:sp>
-      <p:sp>
-        <p:nvSpPr>
-          <p:cNvPr id="4" name="Shape 2"/>
+          <p:cNvPr id="3" name="Shape 1"/>
           <p:cNvSpPr/>
           <p:nvPr/>
         </p:nvSpPr>
@@ -6410,7 +6215,7 @@
       </p:sp>
       <p:sp>
         <p:nvSpPr>
-          <p:cNvPr id="5" name="Shape 3"/>
+          <p:cNvPr id="4" name="Shape 2"/>
           <p:cNvSpPr/>
           <p:nvPr/>
         </p:nvSpPr>
@@ -6435,7 +6240,7 @@
       </p:sp>
       <p:pic>
         <p:nvPicPr>
-          <p:cNvPr id="6" name="Image 0" descr="preencoded.png">    </p:cNvPr>
+          <p:cNvPr id="5" name="Image 0" descr="preencoded.png">    </p:cNvPr>
           <p:cNvPicPr>
             <a:picLocks noChangeAspect="1"/>
           </p:cNvPicPr>
@@ -6459,7 +6264,7 @@
       </p:pic>
       <p:sp>
         <p:nvSpPr>
-          <p:cNvPr id="7" name="Text 4"/>
+          <p:cNvPr id="6" name="Text 3"/>
           <p:cNvSpPr txBox="1"/>
           <p:nvPr/>
         </p:nvSpPr>
@@ -6498,7 +6303,7 @@
       </p:sp>
       <p:sp>
         <p:nvSpPr>
-          <p:cNvPr id="8" name="Text 5"/>
+          <p:cNvPr id="7" name="Text 4"/>
           <p:cNvSpPr txBox="1"/>
           <p:nvPr/>
         </p:nvSpPr>
@@ -6537,7 +6342,7 @@
       </p:sp>
       <p:sp>
         <p:nvSpPr>
-          <p:cNvPr id="9" name="Shape 6"/>
+          <p:cNvPr id="8" name="Shape 5"/>
           <p:cNvSpPr/>
           <p:nvPr/>
         </p:nvSpPr>
@@ -6557,7 +6362,7 @@
       </p:sp>
       <p:sp>
         <p:nvSpPr>
-          <p:cNvPr id="10" name="Text 7"/>
+          <p:cNvPr id="9" name="Text 6"/>
           <p:cNvSpPr txBox="1"/>
           <p:nvPr/>
         </p:nvSpPr>
@@ -6596,7 +6401,7 @@
       </p:sp>
       <p:sp>
         <p:nvSpPr>
-          <p:cNvPr id="11" name="Text 8"/>
+          <p:cNvPr id="10" name="Text 7"/>
           <p:cNvSpPr txBox="1"/>
           <p:nvPr/>
         </p:nvSpPr>
@@ -6635,7 +6440,7 @@
       </p:sp>
       <p:pic>
         <p:nvPicPr>
-          <p:cNvPr id="12" name="Image 1" descr="preencoded.png">    </p:cNvPr>
+          <p:cNvPr id="11" name="Image 1" descr="preencoded.png">    </p:cNvPr>
           <p:cNvPicPr>
             <a:picLocks noChangeAspect="1"/>
           </p:cNvPicPr>
@@ -6659,7 +6464,7 @@
       </p:pic>
       <p:sp>
         <p:nvSpPr>
-          <p:cNvPr id="13" name="Text 9"/>
+          <p:cNvPr id="12" name="Text 8"/>
           <p:cNvSpPr txBox="1"/>
           <p:nvPr/>
         </p:nvSpPr>
@@ -6698,7 +6503,7 @@
       </p:sp>
       <p:sp>
         <p:nvSpPr>
-          <p:cNvPr id="14" name="Shape 10"/>
+          <p:cNvPr id="13" name="Shape 9"/>
           <p:cNvSpPr/>
           <p:nvPr/>
         </p:nvSpPr>
@@ -6732,7 +6537,7 @@
       </p:sp>
       <p:sp>
         <p:nvSpPr>
-          <p:cNvPr id="15" name="Shape 11"/>
+          <p:cNvPr id="14" name="Shape 10"/>
           <p:cNvSpPr/>
           <p:nvPr/>
         </p:nvSpPr>
@@ -6757,7 +6562,7 @@
       </p:sp>
       <p:pic>
         <p:nvPicPr>
-          <p:cNvPr id="16" name="Image 2" descr="preencoded.png">    </p:cNvPr>
+          <p:cNvPr id="15" name="Image 2" descr="preencoded.png">    </p:cNvPr>
           <p:cNvPicPr>
             <a:picLocks noChangeAspect="1"/>
           </p:cNvPicPr>
@@ -6781,7 +6586,7 @@
       </p:pic>
       <p:sp>
         <p:nvSpPr>
-          <p:cNvPr id="17" name="Text 12"/>
+          <p:cNvPr id="16" name="Text 11"/>
           <p:cNvSpPr txBox="1"/>
           <p:nvPr/>
         </p:nvSpPr>
@@ -6820,7 +6625,7 @@
       </p:sp>
       <p:sp>
         <p:nvSpPr>
-          <p:cNvPr id="18" name="Text 13"/>
+          <p:cNvPr id="17" name="Text 12"/>
           <p:cNvSpPr txBox="1"/>
           <p:nvPr/>
         </p:nvSpPr>
@@ -6859,7 +6664,7 @@
       </p:sp>
       <p:sp>
         <p:nvSpPr>
-          <p:cNvPr id="19" name="Shape 14"/>
+          <p:cNvPr id="18" name="Shape 13"/>
           <p:cNvSpPr/>
           <p:nvPr/>
         </p:nvSpPr>
@@ -6879,7 +6684,7 @@
       </p:sp>
       <p:sp>
         <p:nvSpPr>
-          <p:cNvPr id="20" name="Text 15"/>
+          <p:cNvPr id="19" name="Text 14"/>
           <p:cNvSpPr txBox="1"/>
           <p:nvPr/>
         </p:nvSpPr>
@@ -6918,7 +6723,7 @@
       </p:sp>
       <p:sp>
         <p:nvSpPr>
-          <p:cNvPr id="21" name="Text 16"/>
+          <p:cNvPr id="20" name="Text 15"/>
           <p:cNvSpPr txBox="1"/>
           <p:nvPr/>
         </p:nvSpPr>
@@ -6957,7 +6762,7 @@
       </p:sp>
       <p:pic>
         <p:nvPicPr>
-          <p:cNvPr id="22" name="Image 3" descr="preencoded.png">    </p:cNvPr>
+          <p:cNvPr id="21" name="Image 3" descr="preencoded.png">    </p:cNvPr>
           <p:cNvPicPr>
             <a:picLocks noChangeAspect="1"/>
           </p:cNvPicPr>
@@ -6981,7 +6786,7 @@
       </p:pic>
       <p:sp>
         <p:nvSpPr>
-          <p:cNvPr id="23" name="Text 17"/>
+          <p:cNvPr id="22" name="Text 16"/>
           <p:cNvSpPr txBox="1"/>
           <p:nvPr/>
         </p:nvSpPr>
@@ -7020,7 +6825,7 @@
       </p:sp>
       <p:sp>
         <p:nvSpPr>
-          <p:cNvPr id="24" name="Shape 18"/>
+          <p:cNvPr id="23" name="Shape 17"/>
           <p:cNvSpPr/>
           <p:nvPr/>
         </p:nvSpPr>
@@ -7054,7 +6859,7 @@
       </p:sp>
       <p:sp>
         <p:nvSpPr>
-          <p:cNvPr id="25" name="Shape 19"/>
+          <p:cNvPr id="24" name="Shape 18"/>
           <p:cNvSpPr/>
           <p:nvPr/>
         </p:nvSpPr>
@@ -7079,7 +6884,7 @@
       </p:sp>
       <p:pic>
         <p:nvPicPr>
-          <p:cNvPr id="26" name="Image 4" descr="preencoded.png">    </p:cNvPr>
+          <p:cNvPr id="25" name="Image 4" descr="preencoded.png">    </p:cNvPr>
           <p:cNvPicPr>
             <a:picLocks noChangeAspect="1"/>
           </p:cNvPicPr>
@@ -7103,7 +6908,7 @@
       </p:pic>
       <p:sp>
         <p:nvSpPr>
-          <p:cNvPr id="27" name="Text 20"/>
+          <p:cNvPr id="26" name="Text 19"/>
           <p:cNvSpPr txBox="1"/>
           <p:nvPr/>
         </p:nvSpPr>
@@ -7142,7 +6947,7 @@
       </p:sp>
       <p:sp>
         <p:nvSpPr>
-          <p:cNvPr id="28" name="Text 21"/>
+          <p:cNvPr id="27" name="Text 20"/>
           <p:cNvSpPr txBox="1"/>
           <p:nvPr/>
         </p:nvSpPr>
@@ -7181,7 +6986,7 @@
       </p:sp>
       <p:sp>
         <p:nvSpPr>
-          <p:cNvPr id="29" name="Shape 22"/>
+          <p:cNvPr id="28" name="Shape 21"/>
           <p:cNvSpPr/>
           <p:nvPr/>
         </p:nvSpPr>
@@ -7201,7 +7006,7 @@
       </p:sp>
       <p:sp>
         <p:nvSpPr>
-          <p:cNvPr id="30" name="Text 23"/>
+          <p:cNvPr id="29" name="Text 22"/>
           <p:cNvSpPr txBox="1"/>
           <p:nvPr/>
         </p:nvSpPr>
@@ -7240,7 +7045,7 @@
       </p:sp>
       <p:sp>
         <p:nvSpPr>
-          <p:cNvPr id="31" name="Text 24"/>
+          <p:cNvPr id="30" name="Text 23"/>
           <p:cNvSpPr txBox="1"/>
           <p:nvPr/>
         </p:nvSpPr>
@@ -7279,7 +7084,7 @@
       </p:sp>
       <p:pic>
         <p:nvPicPr>
-          <p:cNvPr id="32" name="Image 5" descr="preencoded.png">    </p:cNvPr>
+          <p:cNvPr id="31" name="Image 5" descr="preencoded.png">    </p:cNvPr>
           <p:cNvPicPr>
             <a:picLocks noChangeAspect="1"/>
           </p:cNvPicPr>
@@ -7303,7 +7108,7 @@
       </p:pic>
       <p:sp>
         <p:nvSpPr>
-          <p:cNvPr id="33" name="Text 25"/>
+          <p:cNvPr id="32" name="Text 24"/>
           <p:cNvSpPr txBox="1"/>
           <p:nvPr/>
         </p:nvSpPr>
@@ -7342,7 +7147,7 @@
       </p:sp>
       <p:sp>
         <p:nvSpPr>
-          <p:cNvPr id="34" name="Shape 26"/>
+          <p:cNvPr id="33" name="Shape 25"/>
           <p:cNvSpPr/>
           <p:nvPr/>
         </p:nvSpPr>
@@ -7376,7 +7181,7 @@
       </p:sp>
       <p:sp>
         <p:nvSpPr>
-          <p:cNvPr id="35" name="Shape 27"/>
+          <p:cNvPr id="34" name="Shape 26"/>
           <p:cNvSpPr/>
           <p:nvPr/>
         </p:nvSpPr>
@@ -7401,7 +7206,7 @@
       </p:sp>
       <p:pic>
         <p:nvPicPr>
-          <p:cNvPr id="36" name="Image 6" descr="preencoded.png">    </p:cNvPr>
+          <p:cNvPr id="35" name="Image 6" descr="preencoded.png">    </p:cNvPr>
           <p:cNvPicPr>
             <a:picLocks noChangeAspect="1"/>
           </p:cNvPicPr>
@@ -7425,7 +7230,7 @@
       </p:pic>
       <p:sp>
         <p:nvSpPr>
-          <p:cNvPr id="37" name="Text 28"/>
+          <p:cNvPr id="36" name="Text 27"/>
           <p:cNvSpPr txBox="1"/>
           <p:nvPr/>
         </p:nvSpPr>
@@ -7464,7 +7269,7 @@
       </p:sp>
       <p:sp>
         <p:nvSpPr>
-          <p:cNvPr id="38" name="Text 29"/>
+          <p:cNvPr id="37" name="Text 28"/>
           <p:cNvSpPr txBox="1"/>
           <p:nvPr/>
         </p:nvSpPr>
@@ -7503,7 +7308,7 @@
       </p:sp>
       <p:sp>
         <p:nvSpPr>
-          <p:cNvPr id="39" name="Shape 30"/>
+          <p:cNvPr id="38" name="Shape 29"/>
           <p:cNvSpPr/>
           <p:nvPr/>
         </p:nvSpPr>
@@ -7523,7 +7328,7 @@
       </p:sp>
       <p:sp>
         <p:nvSpPr>
-          <p:cNvPr id="40" name="Text 31"/>
+          <p:cNvPr id="39" name="Text 30"/>
           <p:cNvSpPr txBox="1"/>
           <p:nvPr/>
         </p:nvSpPr>
@@ -7562,7 +7367,7 @@
       </p:sp>
       <p:sp>
         <p:nvSpPr>
-          <p:cNvPr id="41" name="Text 32"/>
+          <p:cNvPr id="40" name="Text 31"/>
           <p:cNvSpPr txBox="1"/>
           <p:nvPr/>
         </p:nvSpPr>
@@ -7601,7 +7406,7 @@
       </p:sp>
       <p:pic>
         <p:nvPicPr>
-          <p:cNvPr id="42" name="Image 7" descr="preencoded.png">    </p:cNvPr>
+          <p:cNvPr id="41" name="Image 7" descr="preencoded.png">    </p:cNvPr>
           <p:cNvPicPr>
             <a:picLocks noChangeAspect="1"/>
           </p:cNvPicPr>
@@ -7625,7 +7430,7 @@
       </p:pic>
       <p:sp>
         <p:nvSpPr>
-          <p:cNvPr id="43" name="Text 33"/>
+          <p:cNvPr id="42" name="Text 32"/>
           <p:cNvSpPr txBox="1"/>
           <p:nvPr/>
         </p:nvSpPr>
@@ -7664,7 +7469,7 @@
       </p:sp>
       <p:pic>
         <p:nvPicPr>
-          <p:cNvPr id="44" name="Image 8" descr="preencoded.png">    </p:cNvPr>
+          <p:cNvPr id="43" name="Image 8" descr="preencoded.png">    </p:cNvPr>
           <p:cNvPicPr>
             <a:picLocks noChangeAspect="1"/>
           </p:cNvPicPr>
@@ -7688,7 +7493,7 @@
       </p:pic>
       <p:sp>
         <p:nvSpPr>
-          <p:cNvPr id="45" name="Text 34"/>
+          <p:cNvPr id="44" name="Text 33"/>
           <p:cNvSpPr txBox="1"/>
           <p:nvPr/>
         </p:nvSpPr>
@@ -7727,7 +7532,7 @@
       </p:sp>
       <p:pic>
         <p:nvPicPr>
-          <p:cNvPr id="46" name="Image 9" descr="preencoded.png">    </p:cNvPr>
+          <p:cNvPr id="45" name="Image 9" descr="preencoded.png">    </p:cNvPr>
           <p:cNvPicPr>
             <a:picLocks noChangeAspect="1"/>
           </p:cNvPicPr>
@@ -7751,7 +7556,7 @@
       </p:pic>
       <p:sp>
         <p:nvSpPr>
-          <p:cNvPr id="47" name="Text 35"/>
+          <p:cNvPr id="46" name="Text 34"/>
           <p:cNvSpPr txBox="1"/>
           <p:nvPr/>
         </p:nvSpPr>
@@ -7790,7 +7595,7 @@
       </p:sp>
       <p:sp>
         <p:nvSpPr>
-          <p:cNvPr id="48" name="Text 36"/>
+          <p:cNvPr id="47" name="Text 35"/>
           <p:cNvSpPr txBox="1"/>
           <p:nvPr/>
         </p:nvSpPr>
@@ -7867,7 +7672,7 @@
         </p:nvSpPr>
         <p:spPr>
           <a:xfrm>
-            <a:off x="658368" y="548640"/>
+            <a:off x="658368" y="749808"/>
             <a:ext cx="10874959" cy="786384"/>
           </a:xfrm>
           <a:prstGeom prst="rect">
@@ -7900,46 +7705,7 @@
       </p:sp>
       <p:sp>
         <p:nvSpPr>
-          <p:cNvPr id="3" name="Text 1"/>
-          <p:cNvSpPr txBox="1"/>
-          <p:nvPr/>
-        </p:nvSpPr>
-        <p:spPr>
-          <a:xfrm>
-            <a:off x="658368" y="1335024"/>
-            <a:ext cx="9777679" cy="310896"/>
-          </a:xfrm>
-          <a:prstGeom prst="rect">
-            <a:avLst/>
-          </a:prstGeom>
-          <a:noFill/>
-          <a:ln/>
-        </p:spPr>
-        <p:txBody>
-          <a:bodyPr wrap="square" lIns="0" tIns="0" rIns="0" bIns="0" rtlCol="0" anchor="ctr"/>
-          <a:lstStyle/>
-          <a:p>
-            <a:pPr indent="0" marL="0">
-              <a:buNone/>
-            </a:pPr>
-            <a:r>
-              <a:rPr lang="en-US" sz="1350" dirty="0">
-                <a:solidFill>
-                  <a:srgbClr val="3E5147"/>
-                </a:solidFill>
-                <a:latin typeface="Montserrat" pitchFamily="34" charset="0"/>
-                <a:ea typeface="Montserrat" pitchFamily="34" charset="-122"/>
-                <a:cs typeface="Montserrat" pitchFamily="34" charset="-120"/>
-              </a:rPr>
-              <a:t>Из 5 670 портфелей условия проходят 143. Каждая точка — один из них.</a:t>
-            </a:r>
-            <a:endParaRPr lang="en-US" sz="1350" dirty="0"/>
-          </a:p>
-        </p:txBody>
-      </p:sp>
-      <p:sp>
-        <p:nvSpPr>
-          <p:cNvPr id="4" name="Shape 2"/>
+          <p:cNvPr id="3" name="Shape 1"/>
           <p:cNvSpPr/>
           <p:nvPr/>
         </p:nvSpPr>
@@ -7973,7 +7739,7 @@
       </p:sp>
       <p:sp>
         <p:nvSpPr>
-          <p:cNvPr id="5" name="Shape 3"/>
+          <p:cNvPr id="4" name="Shape 2"/>
           <p:cNvSpPr/>
           <p:nvPr/>
         </p:nvSpPr>
@@ -7993,7 +7759,7 @@
       </p:sp>
       <p:sp>
         <p:nvSpPr>
-          <p:cNvPr id="6" name="Text 4"/>
+          <p:cNvPr id="5" name="Text 3"/>
           <p:cNvSpPr txBox="1"/>
           <p:nvPr/>
         </p:nvSpPr>
@@ -8032,7 +7798,7 @@
       </p:sp>
       <p:sp>
         <p:nvSpPr>
-          <p:cNvPr id="7" name="Shape 5"/>
+          <p:cNvPr id="6" name="Shape 4"/>
           <p:cNvSpPr/>
           <p:nvPr/>
         </p:nvSpPr>
@@ -8052,7 +7818,7 @@
       </p:sp>
       <p:sp>
         <p:nvSpPr>
-          <p:cNvPr id="8" name="Text 6"/>
+          <p:cNvPr id="7" name="Text 5"/>
           <p:cNvSpPr txBox="1"/>
           <p:nvPr/>
         </p:nvSpPr>
@@ -8091,7 +7857,7 @@
       </p:sp>
       <p:sp>
         <p:nvSpPr>
-          <p:cNvPr id="9" name="Shape 7"/>
+          <p:cNvPr id="8" name="Shape 6"/>
           <p:cNvSpPr/>
           <p:nvPr/>
         </p:nvSpPr>
@@ -8111,7 +7877,7 @@
       </p:sp>
       <p:sp>
         <p:nvSpPr>
-          <p:cNvPr id="10" name="Text 8"/>
+          <p:cNvPr id="9" name="Text 7"/>
           <p:cNvSpPr txBox="1"/>
           <p:nvPr/>
         </p:nvSpPr>
@@ -8150,7 +7916,7 @@
       </p:sp>
       <p:sp>
         <p:nvSpPr>
-          <p:cNvPr id="11" name="Shape 9"/>
+          <p:cNvPr id="10" name="Shape 8"/>
           <p:cNvSpPr/>
           <p:nvPr/>
         </p:nvSpPr>
@@ -8170,7 +7936,7 @@
       </p:sp>
       <p:sp>
         <p:nvSpPr>
-          <p:cNvPr id="12" name="Text 10"/>
+          <p:cNvPr id="11" name="Text 9"/>
           <p:cNvSpPr txBox="1"/>
           <p:nvPr/>
         </p:nvSpPr>
@@ -8209,7 +7975,7 @@
       </p:sp>
       <p:sp>
         <p:nvSpPr>
-          <p:cNvPr id="13" name="Shape 11"/>
+          <p:cNvPr id="12" name="Shape 10"/>
           <p:cNvSpPr/>
           <p:nvPr/>
         </p:nvSpPr>
@@ -8229,7 +7995,7 @@
       </p:sp>
       <p:sp>
         <p:nvSpPr>
-          <p:cNvPr id="14" name="Text 12"/>
+          <p:cNvPr id="13" name="Text 11"/>
           <p:cNvSpPr txBox="1"/>
           <p:nvPr/>
         </p:nvSpPr>
@@ -8268,7 +8034,7 @@
       </p:sp>
       <p:sp>
         <p:nvSpPr>
-          <p:cNvPr id="15" name="Text 13"/>
+          <p:cNvPr id="14" name="Text 12"/>
           <p:cNvSpPr txBox="1"/>
           <p:nvPr/>
         </p:nvSpPr>
@@ -8307,7 +8073,7 @@
       </p:sp>
       <p:sp>
         <p:nvSpPr>
-          <p:cNvPr id="16" name="Text 14"/>
+          <p:cNvPr id="15" name="Text 13"/>
           <p:cNvSpPr txBox="1"/>
           <p:nvPr/>
         </p:nvSpPr>
@@ -8346,7 +8112,7 @@
       </p:sp>
       <p:sp>
         <p:nvSpPr>
-          <p:cNvPr id="17" name="Text 15"/>
+          <p:cNvPr id="16" name="Text 14"/>
           <p:cNvSpPr txBox="1"/>
           <p:nvPr/>
         </p:nvSpPr>
@@ -8385,7 +8151,7 @@
       </p:sp>
       <p:sp>
         <p:nvSpPr>
-          <p:cNvPr id="18" name="Text 16"/>
+          <p:cNvPr id="17" name="Text 15"/>
           <p:cNvSpPr txBox="1"/>
           <p:nvPr/>
         </p:nvSpPr>
@@ -8424,7 +8190,7 @@
       </p:sp>
       <p:sp>
         <p:nvSpPr>
-          <p:cNvPr id="19" name="Text 17"/>
+          <p:cNvPr id="18" name="Text 16"/>
           <p:cNvSpPr txBox="1"/>
           <p:nvPr/>
         </p:nvSpPr>
@@ -8463,7 +8229,7 @@
       </p:sp>
       <p:sp>
         <p:nvSpPr>
-          <p:cNvPr id="20" name="Text 18"/>
+          <p:cNvPr id="19" name="Text 17"/>
           <p:cNvSpPr txBox="1"/>
           <p:nvPr/>
         </p:nvSpPr>
@@ -8502,7 +8268,7 @@
       </p:sp>
       <p:sp>
         <p:nvSpPr>
-          <p:cNvPr id="21" name="Text 19"/>
+          <p:cNvPr id="20" name="Text 18"/>
           <p:cNvSpPr txBox="1"/>
           <p:nvPr/>
         </p:nvSpPr>
@@ -8541,7 +8307,7 @@
       </p:sp>
       <p:sp>
         <p:nvSpPr>
-          <p:cNvPr id="22" name="Shape 20"/>
+          <p:cNvPr id="21" name="Shape 19"/>
           <p:cNvSpPr/>
           <p:nvPr/>
         </p:nvSpPr>
@@ -8561,7 +8327,7 @@
       </p:sp>
       <p:sp>
         <p:nvSpPr>
-          <p:cNvPr id="23" name="Text 21"/>
+          <p:cNvPr id="22" name="Text 20"/>
           <p:cNvSpPr txBox="1"/>
           <p:nvPr/>
         </p:nvSpPr>
@@ -8600,7 +8366,7 @@
       </p:sp>
       <p:sp>
         <p:nvSpPr>
-          <p:cNvPr id="24" name="Shape 22"/>
+          <p:cNvPr id="23" name="Shape 21"/>
           <p:cNvSpPr/>
           <p:nvPr/>
         </p:nvSpPr>
@@ -8627,7 +8393,7 @@
       </p:sp>
       <p:sp>
         <p:nvSpPr>
-          <p:cNvPr id="25" name="Shape 23"/>
+          <p:cNvPr id="24" name="Shape 22"/>
           <p:cNvSpPr/>
           <p:nvPr/>
         </p:nvSpPr>
@@ -8654,7 +8420,7 @@
       </p:sp>
       <p:sp>
         <p:nvSpPr>
-          <p:cNvPr id="26" name="Shape 24"/>
+          <p:cNvPr id="25" name="Shape 23"/>
           <p:cNvSpPr/>
           <p:nvPr/>
         </p:nvSpPr>
@@ -8681,7 +8447,7 @@
       </p:sp>
       <p:sp>
         <p:nvSpPr>
-          <p:cNvPr id="27" name="Shape 25"/>
+          <p:cNvPr id="26" name="Shape 24"/>
           <p:cNvSpPr/>
           <p:nvPr/>
         </p:nvSpPr>
@@ -8708,7 +8474,7 @@
       </p:sp>
       <p:sp>
         <p:nvSpPr>
-          <p:cNvPr id="28" name="Shape 26"/>
+          <p:cNvPr id="27" name="Shape 25"/>
           <p:cNvSpPr/>
           <p:nvPr/>
         </p:nvSpPr>
@@ -8735,7 +8501,7 @@
       </p:sp>
       <p:sp>
         <p:nvSpPr>
-          <p:cNvPr id="29" name="Shape 27"/>
+          <p:cNvPr id="28" name="Shape 26"/>
           <p:cNvSpPr/>
           <p:nvPr/>
         </p:nvSpPr>
@@ -8762,7 +8528,7 @@
       </p:sp>
       <p:sp>
         <p:nvSpPr>
-          <p:cNvPr id="30" name="Shape 28"/>
+          <p:cNvPr id="29" name="Shape 27"/>
           <p:cNvSpPr/>
           <p:nvPr/>
         </p:nvSpPr>
@@ -8789,7 +8555,7 @@
       </p:sp>
       <p:sp>
         <p:nvSpPr>
-          <p:cNvPr id="31" name="Shape 29"/>
+          <p:cNvPr id="30" name="Shape 28"/>
           <p:cNvSpPr/>
           <p:nvPr/>
         </p:nvSpPr>
@@ -8816,7 +8582,7 @@
       </p:sp>
       <p:sp>
         <p:nvSpPr>
-          <p:cNvPr id="32" name="Shape 30"/>
+          <p:cNvPr id="31" name="Shape 29"/>
           <p:cNvSpPr/>
           <p:nvPr/>
         </p:nvSpPr>
@@ -8843,7 +8609,7 @@
       </p:sp>
       <p:sp>
         <p:nvSpPr>
-          <p:cNvPr id="33" name="Shape 31"/>
+          <p:cNvPr id="32" name="Shape 30"/>
           <p:cNvSpPr/>
           <p:nvPr/>
         </p:nvSpPr>
@@ -8870,7 +8636,7 @@
       </p:sp>
       <p:sp>
         <p:nvSpPr>
-          <p:cNvPr id="34" name="Shape 32"/>
+          <p:cNvPr id="33" name="Shape 31"/>
           <p:cNvSpPr/>
           <p:nvPr/>
         </p:nvSpPr>
@@ -8897,7 +8663,7 @@
       </p:sp>
       <p:sp>
         <p:nvSpPr>
-          <p:cNvPr id="35" name="Shape 33"/>
+          <p:cNvPr id="34" name="Shape 32"/>
           <p:cNvSpPr/>
           <p:nvPr/>
         </p:nvSpPr>
@@ -8924,7 +8690,7 @@
       </p:sp>
       <p:sp>
         <p:nvSpPr>
-          <p:cNvPr id="36" name="Shape 34"/>
+          <p:cNvPr id="35" name="Shape 33"/>
           <p:cNvSpPr/>
           <p:nvPr/>
         </p:nvSpPr>
@@ -8951,7 +8717,7 @@
       </p:sp>
       <p:sp>
         <p:nvSpPr>
-          <p:cNvPr id="37" name="Shape 35"/>
+          <p:cNvPr id="36" name="Shape 34"/>
           <p:cNvSpPr/>
           <p:nvPr/>
         </p:nvSpPr>
@@ -8978,7 +8744,7 @@
       </p:sp>
       <p:sp>
         <p:nvSpPr>
-          <p:cNvPr id="38" name="Shape 36"/>
+          <p:cNvPr id="37" name="Shape 35"/>
           <p:cNvSpPr/>
           <p:nvPr/>
         </p:nvSpPr>
@@ -9005,7 +8771,7 @@
       </p:sp>
       <p:sp>
         <p:nvSpPr>
-          <p:cNvPr id="39" name="Shape 37"/>
+          <p:cNvPr id="38" name="Shape 36"/>
           <p:cNvSpPr/>
           <p:nvPr/>
         </p:nvSpPr>
@@ -9032,7 +8798,7 @@
       </p:sp>
       <p:sp>
         <p:nvSpPr>
-          <p:cNvPr id="40" name="Shape 38"/>
+          <p:cNvPr id="39" name="Shape 37"/>
           <p:cNvSpPr/>
           <p:nvPr/>
         </p:nvSpPr>
@@ -9059,7 +8825,7 @@
       </p:sp>
       <p:sp>
         <p:nvSpPr>
-          <p:cNvPr id="41" name="Shape 39"/>
+          <p:cNvPr id="40" name="Shape 38"/>
           <p:cNvSpPr/>
           <p:nvPr/>
         </p:nvSpPr>
@@ -9086,7 +8852,7 @@
       </p:sp>
       <p:sp>
         <p:nvSpPr>
-          <p:cNvPr id="42" name="Shape 40"/>
+          <p:cNvPr id="41" name="Shape 39"/>
           <p:cNvSpPr/>
           <p:nvPr/>
         </p:nvSpPr>
@@ -9113,7 +8879,7 @@
       </p:sp>
       <p:sp>
         <p:nvSpPr>
-          <p:cNvPr id="43" name="Shape 41"/>
+          <p:cNvPr id="42" name="Shape 40"/>
           <p:cNvSpPr/>
           <p:nvPr/>
         </p:nvSpPr>
@@ -9140,7 +8906,7 @@
       </p:sp>
       <p:sp>
         <p:nvSpPr>
-          <p:cNvPr id="44" name="Shape 42"/>
+          <p:cNvPr id="43" name="Shape 41"/>
           <p:cNvSpPr/>
           <p:nvPr/>
         </p:nvSpPr>
@@ -9167,7 +8933,7 @@
       </p:sp>
       <p:sp>
         <p:nvSpPr>
-          <p:cNvPr id="45" name="Shape 43"/>
+          <p:cNvPr id="44" name="Shape 42"/>
           <p:cNvSpPr/>
           <p:nvPr/>
         </p:nvSpPr>
@@ -9194,7 +8960,7 @@
       </p:sp>
       <p:sp>
         <p:nvSpPr>
-          <p:cNvPr id="46" name="Shape 44"/>
+          <p:cNvPr id="45" name="Shape 43"/>
           <p:cNvSpPr/>
           <p:nvPr/>
         </p:nvSpPr>
@@ -9221,7 +8987,7 @@
       </p:sp>
       <p:sp>
         <p:nvSpPr>
-          <p:cNvPr id="47" name="Shape 45"/>
+          <p:cNvPr id="46" name="Shape 44"/>
           <p:cNvSpPr/>
           <p:nvPr/>
         </p:nvSpPr>
@@ -9248,7 +9014,7 @@
       </p:sp>
       <p:sp>
         <p:nvSpPr>
-          <p:cNvPr id="48" name="Shape 46"/>
+          <p:cNvPr id="47" name="Shape 45"/>
           <p:cNvSpPr/>
           <p:nvPr/>
         </p:nvSpPr>
@@ -9275,7 +9041,7 @@
       </p:sp>
       <p:sp>
         <p:nvSpPr>
-          <p:cNvPr id="49" name="Shape 47"/>
+          <p:cNvPr id="48" name="Shape 46"/>
           <p:cNvSpPr/>
           <p:nvPr/>
         </p:nvSpPr>
@@ -9302,7 +9068,7 @@
       </p:sp>
       <p:sp>
         <p:nvSpPr>
-          <p:cNvPr id="50" name="Shape 48"/>
+          <p:cNvPr id="49" name="Shape 47"/>
           <p:cNvSpPr/>
           <p:nvPr/>
         </p:nvSpPr>
@@ -9329,7 +9095,7 @@
       </p:sp>
       <p:sp>
         <p:nvSpPr>
-          <p:cNvPr id="51" name="Shape 49"/>
+          <p:cNvPr id="50" name="Shape 48"/>
           <p:cNvSpPr/>
           <p:nvPr/>
         </p:nvSpPr>
@@ -9356,7 +9122,7 @@
       </p:sp>
       <p:sp>
         <p:nvSpPr>
-          <p:cNvPr id="52" name="Shape 50"/>
+          <p:cNvPr id="51" name="Shape 49"/>
           <p:cNvSpPr/>
           <p:nvPr/>
         </p:nvSpPr>
@@ -9383,7 +9149,7 @@
       </p:sp>
       <p:sp>
         <p:nvSpPr>
-          <p:cNvPr id="53" name="Shape 51"/>
+          <p:cNvPr id="52" name="Shape 50"/>
           <p:cNvSpPr/>
           <p:nvPr/>
         </p:nvSpPr>
@@ -9410,7 +9176,7 @@
       </p:sp>
       <p:sp>
         <p:nvSpPr>
-          <p:cNvPr id="54" name="Shape 52"/>
+          <p:cNvPr id="53" name="Shape 51"/>
           <p:cNvSpPr/>
           <p:nvPr/>
         </p:nvSpPr>
@@ -9437,7 +9203,7 @@
       </p:sp>
       <p:sp>
         <p:nvSpPr>
-          <p:cNvPr id="55" name="Shape 53"/>
+          <p:cNvPr id="54" name="Shape 52"/>
           <p:cNvSpPr/>
           <p:nvPr/>
         </p:nvSpPr>
@@ -9464,7 +9230,7 @@
       </p:sp>
       <p:sp>
         <p:nvSpPr>
-          <p:cNvPr id="56" name="Shape 54"/>
+          <p:cNvPr id="55" name="Shape 53"/>
           <p:cNvSpPr/>
           <p:nvPr/>
         </p:nvSpPr>
@@ -9491,7 +9257,7 @@
       </p:sp>
       <p:sp>
         <p:nvSpPr>
-          <p:cNvPr id="57" name="Shape 55"/>
+          <p:cNvPr id="56" name="Shape 54"/>
           <p:cNvSpPr/>
           <p:nvPr/>
         </p:nvSpPr>
@@ -9518,7 +9284,7 @@
       </p:sp>
       <p:sp>
         <p:nvSpPr>
-          <p:cNvPr id="58" name="Shape 56"/>
+          <p:cNvPr id="57" name="Shape 55"/>
           <p:cNvSpPr/>
           <p:nvPr/>
         </p:nvSpPr>
@@ -9545,7 +9311,7 @@
       </p:sp>
       <p:sp>
         <p:nvSpPr>
-          <p:cNvPr id="59" name="Shape 57"/>
+          <p:cNvPr id="58" name="Shape 56"/>
           <p:cNvSpPr/>
           <p:nvPr/>
         </p:nvSpPr>
@@ -9572,7 +9338,7 @@
       </p:sp>
       <p:sp>
         <p:nvSpPr>
-          <p:cNvPr id="60" name="Shape 58"/>
+          <p:cNvPr id="59" name="Shape 57"/>
           <p:cNvSpPr/>
           <p:nvPr/>
         </p:nvSpPr>
@@ -9599,7 +9365,7 @@
       </p:sp>
       <p:sp>
         <p:nvSpPr>
-          <p:cNvPr id="61" name="Shape 59"/>
+          <p:cNvPr id="60" name="Shape 58"/>
           <p:cNvSpPr/>
           <p:nvPr/>
         </p:nvSpPr>
@@ -9626,7 +9392,7 @@
       </p:sp>
       <p:sp>
         <p:nvSpPr>
-          <p:cNvPr id="62" name="Shape 60"/>
+          <p:cNvPr id="61" name="Shape 59"/>
           <p:cNvSpPr/>
           <p:nvPr/>
         </p:nvSpPr>
@@ -9653,7 +9419,7 @@
       </p:sp>
       <p:sp>
         <p:nvSpPr>
-          <p:cNvPr id="63" name="Shape 61"/>
+          <p:cNvPr id="62" name="Shape 60"/>
           <p:cNvSpPr/>
           <p:nvPr/>
         </p:nvSpPr>
@@ -9680,7 +9446,7 @@
       </p:sp>
       <p:sp>
         <p:nvSpPr>
-          <p:cNvPr id="64" name="Shape 62"/>
+          <p:cNvPr id="63" name="Shape 61"/>
           <p:cNvSpPr/>
           <p:nvPr/>
         </p:nvSpPr>
@@ -9707,7 +9473,7 @@
       </p:sp>
       <p:sp>
         <p:nvSpPr>
-          <p:cNvPr id="65" name="Shape 63"/>
+          <p:cNvPr id="64" name="Shape 62"/>
           <p:cNvSpPr/>
           <p:nvPr/>
         </p:nvSpPr>
@@ -9734,7 +9500,7 @@
       </p:sp>
       <p:sp>
         <p:nvSpPr>
-          <p:cNvPr id="66" name="Shape 64"/>
+          <p:cNvPr id="65" name="Shape 63"/>
           <p:cNvSpPr/>
           <p:nvPr/>
         </p:nvSpPr>
@@ -9761,7 +9527,7 @@
       </p:sp>
       <p:sp>
         <p:nvSpPr>
-          <p:cNvPr id="67" name="Shape 65"/>
+          <p:cNvPr id="66" name="Shape 64"/>
           <p:cNvSpPr/>
           <p:nvPr/>
         </p:nvSpPr>
@@ -9788,7 +9554,7 @@
       </p:sp>
       <p:sp>
         <p:nvSpPr>
-          <p:cNvPr id="68" name="Shape 66"/>
+          <p:cNvPr id="67" name="Shape 65"/>
           <p:cNvSpPr/>
           <p:nvPr/>
         </p:nvSpPr>
@@ -9815,7 +9581,7 @@
       </p:sp>
       <p:sp>
         <p:nvSpPr>
-          <p:cNvPr id="69" name="Shape 67"/>
+          <p:cNvPr id="68" name="Shape 66"/>
           <p:cNvSpPr/>
           <p:nvPr/>
         </p:nvSpPr>
@@ -9842,7 +9608,7 @@
       </p:sp>
       <p:sp>
         <p:nvSpPr>
-          <p:cNvPr id="70" name="Shape 68"/>
+          <p:cNvPr id="69" name="Shape 67"/>
           <p:cNvSpPr/>
           <p:nvPr/>
         </p:nvSpPr>
@@ -9869,7 +9635,7 @@
       </p:sp>
       <p:sp>
         <p:nvSpPr>
-          <p:cNvPr id="71" name="Shape 69"/>
+          <p:cNvPr id="70" name="Shape 68"/>
           <p:cNvSpPr/>
           <p:nvPr/>
         </p:nvSpPr>
@@ -9896,7 +9662,7 @@
       </p:sp>
       <p:sp>
         <p:nvSpPr>
-          <p:cNvPr id="72" name="Shape 70"/>
+          <p:cNvPr id="71" name="Shape 69"/>
           <p:cNvSpPr/>
           <p:nvPr/>
         </p:nvSpPr>
@@ -9923,7 +9689,7 @@
       </p:sp>
       <p:sp>
         <p:nvSpPr>
-          <p:cNvPr id="73" name="Shape 71"/>
+          <p:cNvPr id="72" name="Shape 70"/>
           <p:cNvSpPr/>
           <p:nvPr/>
         </p:nvSpPr>
@@ -9950,7 +9716,7 @@
       </p:sp>
       <p:sp>
         <p:nvSpPr>
-          <p:cNvPr id="74" name="Shape 72"/>
+          <p:cNvPr id="73" name="Shape 71"/>
           <p:cNvSpPr/>
           <p:nvPr/>
         </p:nvSpPr>
@@ -9977,7 +9743,7 @@
       </p:sp>
       <p:sp>
         <p:nvSpPr>
-          <p:cNvPr id="75" name="Shape 73"/>
+          <p:cNvPr id="74" name="Shape 72"/>
           <p:cNvSpPr/>
           <p:nvPr/>
         </p:nvSpPr>
@@ -10004,7 +9770,7 @@
       </p:sp>
       <p:sp>
         <p:nvSpPr>
-          <p:cNvPr id="76" name="Shape 74"/>
+          <p:cNvPr id="75" name="Shape 73"/>
           <p:cNvSpPr/>
           <p:nvPr/>
         </p:nvSpPr>
@@ -10031,7 +9797,7 @@
       </p:sp>
       <p:sp>
         <p:nvSpPr>
-          <p:cNvPr id="77" name="Shape 75"/>
+          <p:cNvPr id="76" name="Shape 74"/>
           <p:cNvSpPr/>
           <p:nvPr/>
         </p:nvSpPr>
@@ -10058,7 +9824,7 @@
       </p:sp>
       <p:sp>
         <p:nvSpPr>
-          <p:cNvPr id="78" name="Shape 76"/>
+          <p:cNvPr id="77" name="Shape 75"/>
           <p:cNvSpPr/>
           <p:nvPr/>
         </p:nvSpPr>
@@ -10085,7 +9851,7 @@
       </p:sp>
       <p:sp>
         <p:nvSpPr>
-          <p:cNvPr id="79" name="Shape 77"/>
+          <p:cNvPr id="78" name="Shape 76"/>
           <p:cNvSpPr/>
           <p:nvPr/>
         </p:nvSpPr>
@@ -10112,7 +9878,7 @@
       </p:sp>
       <p:sp>
         <p:nvSpPr>
-          <p:cNvPr id="80" name="Shape 78"/>
+          <p:cNvPr id="79" name="Shape 77"/>
           <p:cNvSpPr/>
           <p:nvPr/>
         </p:nvSpPr>
@@ -10139,7 +9905,7 @@
       </p:sp>
       <p:sp>
         <p:nvSpPr>
-          <p:cNvPr id="81" name="Shape 79"/>
+          <p:cNvPr id="80" name="Shape 78"/>
           <p:cNvSpPr/>
           <p:nvPr/>
         </p:nvSpPr>
@@ -10166,7 +9932,7 @@
       </p:sp>
       <p:sp>
         <p:nvSpPr>
-          <p:cNvPr id="82" name="Shape 80"/>
+          <p:cNvPr id="81" name="Shape 79"/>
           <p:cNvSpPr/>
           <p:nvPr/>
         </p:nvSpPr>
@@ -10193,7 +9959,7 @@
       </p:sp>
       <p:sp>
         <p:nvSpPr>
-          <p:cNvPr id="83" name="Shape 81"/>
+          <p:cNvPr id="82" name="Shape 80"/>
           <p:cNvSpPr/>
           <p:nvPr/>
         </p:nvSpPr>
@@ -10220,7 +9986,7 @@
       </p:sp>
       <p:sp>
         <p:nvSpPr>
-          <p:cNvPr id="84" name="Shape 82"/>
+          <p:cNvPr id="83" name="Shape 81"/>
           <p:cNvSpPr/>
           <p:nvPr/>
         </p:nvSpPr>
@@ -10247,7 +10013,7 @@
       </p:sp>
       <p:sp>
         <p:nvSpPr>
-          <p:cNvPr id="85" name="Shape 83"/>
+          <p:cNvPr id="84" name="Shape 82"/>
           <p:cNvSpPr/>
           <p:nvPr/>
         </p:nvSpPr>
@@ -10274,7 +10040,7 @@
       </p:sp>
       <p:sp>
         <p:nvSpPr>
-          <p:cNvPr id="86" name="Shape 84"/>
+          <p:cNvPr id="85" name="Shape 83"/>
           <p:cNvSpPr/>
           <p:nvPr/>
         </p:nvSpPr>
@@ -10301,7 +10067,7 @@
       </p:sp>
       <p:sp>
         <p:nvSpPr>
-          <p:cNvPr id="87" name="Shape 85"/>
+          <p:cNvPr id="86" name="Shape 84"/>
           <p:cNvSpPr/>
           <p:nvPr/>
         </p:nvSpPr>
@@ -10328,7 +10094,7 @@
       </p:sp>
       <p:sp>
         <p:nvSpPr>
-          <p:cNvPr id="88" name="Shape 86"/>
+          <p:cNvPr id="87" name="Shape 85"/>
           <p:cNvSpPr/>
           <p:nvPr/>
         </p:nvSpPr>
@@ -10355,7 +10121,7 @@
       </p:sp>
       <p:sp>
         <p:nvSpPr>
-          <p:cNvPr id="89" name="Shape 87"/>
+          <p:cNvPr id="88" name="Shape 86"/>
           <p:cNvSpPr/>
           <p:nvPr/>
         </p:nvSpPr>
@@ -10382,7 +10148,7 @@
       </p:sp>
       <p:sp>
         <p:nvSpPr>
-          <p:cNvPr id="90" name="Shape 88"/>
+          <p:cNvPr id="89" name="Shape 87"/>
           <p:cNvSpPr/>
           <p:nvPr/>
         </p:nvSpPr>
@@ -10409,7 +10175,7 @@
       </p:sp>
       <p:sp>
         <p:nvSpPr>
-          <p:cNvPr id="91" name="Shape 89"/>
+          <p:cNvPr id="90" name="Shape 88"/>
           <p:cNvSpPr/>
           <p:nvPr/>
         </p:nvSpPr>
@@ -10436,7 +10202,7 @@
       </p:sp>
       <p:sp>
         <p:nvSpPr>
-          <p:cNvPr id="92" name="Shape 90"/>
+          <p:cNvPr id="91" name="Shape 89"/>
           <p:cNvSpPr/>
           <p:nvPr/>
         </p:nvSpPr>
@@ -10463,7 +10229,7 @@
       </p:sp>
       <p:sp>
         <p:nvSpPr>
-          <p:cNvPr id="93" name="Shape 91"/>
+          <p:cNvPr id="92" name="Shape 90"/>
           <p:cNvSpPr/>
           <p:nvPr/>
         </p:nvSpPr>
@@ -10490,7 +10256,7 @@
       </p:sp>
       <p:sp>
         <p:nvSpPr>
-          <p:cNvPr id="94" name="Shape 92"/>
+          <p:cNvPr id="93" name="Shape 91"/>
           <p:cNvSpPr/>
           <p:nvPr/>
         </p:nvSpPr>
@@ -10517,7 +10283,7 @@
       </p:sp>
       <p:sp>
         <p:nvSpPr>
-          <p:cNvPr id="95" name="Shape 93"/>
+          <p:cNvPr id="94" name="Shape 92"/>
           <p:cNvSpPr/>
           <p:nvPr/>
         </p:nvSpPr>
@@ -10544,7 +10310,7 @@
       </p:sp>
       <p:sp>
         <p:nvSpPr>
-          <p:cNvPr id="96" name="Shape 94"/>
+          <p:cNvPr id="95" name="Shape 93"/>
           <p:cNvSpPr/>
           <p:nvPr/>
         </p:nvSpPr>
@@ -10571,7 +10337,7 @@
       </p:sp>
       <p:sp>
         <p:nvSpPr>
-          <p:cNvPr id="97" name="Shape 95"/>
+          <p:cNvPr id="96" name="Shape 94"/>
           <p:cNvSpPr/>
           <p:nvPr/>
         </p:nvSpPr>
@@ -10598,7 +10364,7 @@
       </p:sp>
       <p:sp>
         <p:nvSpPr>
-          <p:cNvPr id="98" name="Shape 96"/>
+          <p:cNvPr id="97" name="Shape 95"/>
           <p:cNvSpPr/>
           <p:nvPr/>
         </p:nvSpPr>
@@ -10625,7 +10391,7 @@
       </p:sp>
       <p:sp>
         <p:nvSpPr>
-          <p:cNvPr id="99" name="Shape 97"/>
+          <p:cNvPr id="98" name="Shape 96"/>
           <p:cNvSpPr/>
           <p:nvPr/>
         </p:nvSpPr>
@@ -10652,7 +10418,7 @@
       </p:sp>
       <p:sp>
         <p:nvSpPr>
-          <p:cNvPr id="100" name="Shape 98"/>
+          <p:cNvPr id="99" name="Shape 97"/>
           <p:cNvSpPr/>
           <p:nvPr/>
         </p:nvSpPr>
@@ -10679,7 +10445,7 @@
       </p:sp>
       <p:sp>
         <p:nvSpPr>
-          <p:cNvPr id="101" name="Shape 99"/>
+          <p:cNvPr id="100" name="Shape 98"/>
           <p:cNvSpPr/>
           <p:nvPr/>
         </p:nvSpPr>
@@ -10706,7 +10472,7 @@
       </p:sp>
       <p:sp>
         <p:nvSpPr>
-          <p:cNvPr id="102" name="Shape 100"/>
+          <p:cNvPr id="101" name="Shape 99"/>
           <p:cNvSpPr/>
           <p:nvPr/>
         </p:nvSpPr>
@@ -10733,7 +10499,7 @@
       </p:sp>
       <p:sp>
         <p:nvSpPr>
-          <p:cNvPr id="103" name="Shape 101"/>
+          <p:cNvPr id="102" name="Shape 100"/>
           <p:cNvSpPr/>
           <p:nvPr/>
         </p:nvSpPr>
@@ -10760,7 +10526,7 @@
       </p:sp>
       <p:sp>
         <p:nvSpPr>
-          <p:cNvPr id="104" name="Shape 102"/>
+          <p:cNvPr id="103" name="Shape 101"/>
           <p:cNvSpPr/>
           <p:nvPr/>
         </p:nvSpPr>
@@ -10787,7 +10553,7 @@
       </p:sp>
       <p:sp>
         <p:nvSpPr>
-          <p:cNvPr id="105" name="Shape 103"/>
+          <p:cNvPr id="104" name="Shape 102"/>
           <p:cNvSpPr/>
           <p:nvPr/>
         </p:nvSpPr>
@@ -10814,7 +10580,7 @@
       </p:sp>
       <p:sp>
         <p:nvSpPr>
-          <p:cNvPr id="106" name="Shape 104"/>
+          <p:cNvPr id="105" name="Shape 103"/>
           <p:cNvSpPr/>
           <p:nvPr/>
         </p:nvSpPr>
@@ -10841,7 +10607,7 @@
       </p:sp>
       <p:sp>
         <p:nvSpPr>
-          <p:cNvPr id="107" name="Shape 105"/>
+          <p:cNvPr id="106" name="Shape 104"/>
           <p:cNvSpPr/>
           <p:nvPr/>
         </p:nvSpPr>
@@ -10868,7 +10634,7 @@
       </p:sp>
       <p:sp>
         <p:nvSpPr>
-          <p:cNvPr id="108" name="Shape 106"/>
+          <p:cNvPr id="107" name="Shape 105"/>
           <p:cNvSpPr/>
           <p:nvPr/>
         </p:nvSpPr>
@@ -10895,7 +10661,7 @@
       </p:sp>
       <p:sp>
         <p:nvSpPr>
-          <p:cNvPr id="109" name="Shape 107"/>
+          <p:cNvPr id="108" name="Shape 106"/>
           <p:cNvSpPr/>
           <p:nvPr/>
         </p:nvSpPr>
@@ -10922,7 +10688,7 @@
       </p:sp>
       <p:sp>
         <p:nvSpPr>
-          <p:cNvPr id="110" name="Shape 108"/>
+          <p:cNvPr id="109" name="Shape 107"/>
           <p:cNvSpPr/>
           <p:nvPr/>
         </p:nvSpPr>
@@ -10949,7 +10715,7 @@
       </p:sp>
       <p:sp>
         <p:nvSpPr>
-          <p:cNvPr id="111" name="Shape 109"/>
+          <p:cNvPr id="110" name="Shape 108"/>
           <p:cNvSpPr/>
           <p:nvPr/>
         </p:nvSpPr>
@@ -10976,7 +10742,7 @@
       </p:sp>
       <p:sp>
         <p:nvSpPr>
-          <p:cNvPr id="112" name="Shape 110"/>
+          <p:cNvPr id="111" name="Shape 109"/>
           <p:cNvSpPr/>
           <p:nvPr/>
         </p:nvSpPr>
@@ -11003,7 +10769,7 @@
       </p:sp>
       <p:sp>
         <p:nvSpPr>
-          <p:cNvPr id="113" name="Shape 111"/>
+          <p:cNvPr id="112" name="Shape 110"/>
           <p:cNvSpPr/>
           <p:nvPr/>
         </p:nvSpPr>
@@ -11030,7 +10796,7 @@
       </p:sp>
       <p:sp>
         <p:nvSpPr>
-          <p:cNvPr id="114" name="Shape 112"/>
+          <p:cNvPr id="113" name="Shape 111"/>
           <p:cNvSpPr/>
           <p:nvPr/>
         </p:nvSpPr>
@@ -11057,7 +10823,7 @@
       </p:sp>
       <p:sp>
         <p:nvSpPr>
-          <p:cNvPr id="115" name="Shape 113"/>
+          <p:cNvPr id="114" name="Shape 112"/>
           <p:cNvSpPr/>
           <p:nvPr/>
         </p:nvSpPr>
@@ -11084,7 +10850,7 @@
       </p:sp>
       <p:sp>
         <p:nvSpPr>
-          <p:cNvPr id="116" name="Shape 114"/>
+          <p:cNvPr id="115" name="Shape 113"/>
           <p:cNvSpPr/>
           <p:nvPr/>
         </p:nvSpPr>
@@ -11111,7 +10877,7 @@
       </p:sp>
       <p:sp>
         <p:nvSpPr>
-          <p:cNvPr id="117" name="Shape 115"/>
+          <p:cNvPr id="116" name="Shape 114"/>
           <p:cNvSpPr/>
           <p:nvPr/>
         </p:nvSpPr>
@@ -11138,7 +10904,7 @@
       </p:sp>
       <p:sp>
         <p:nvSpPr>
-          <p:cNvPr id="118" name="Shape 116"/>
+          <p:cNvPr id="117" name="Shape 115"/>
           <p:cNvSpPr/>
           <p:nvPr/>
         </p:nvSpPr>
@@ -11165,7 +10931,7 @@
       </p:sp>
       <p:sp>
         <p:nvSpPr>
-          <p:cNvPr id="119" name="Shape 117"/>
+          <p:cNvPr id="118" name="Shape 116"/>
           <p:cNvSpPr/>
           <p:nvPr/>
         </p:nvSpPr>
@@ -11192,7 +10958,7 @@
       </p:sp>
       <p:sp>
         <p:nvSpPr>
-          <p:cNvPr id="120" name="Shape 118"/>
+          <p:cNvPr id="119" name="Shape 117"/>
           <p:cNvSpPr/>
           <p:nvPr/>
         </p:nvSpPr>
@@ -11219,7 +10985,7 @@
       </p:sp>
       <p:sp>
         <p:nvSpPr>
-          <p:cNvPr id="121" name="Shape 119"/>
+          <p:cNvPr id="120" name="Shape 118"/>
           <p:cNvSpPr/>
           <p:nvPr/>
         </p:nvSpPr>
@@ -11246,7 +11012,7 @@
       </p:sp>
       <p:sp>
         <p:nvSpPr>
-          <p:cNvPr id="122" name="Shape 120"/>
+          <p:cNvPr id="121" name="Shape 119"/>
           <p:cNvSpPr/>
           <p:nvPr/>
         </p:nvSpPr>
@@ -11273,7 +11039,7 @@
       </p:sp>
       <p:sp>
         <p:nvSpPr>
-          <p:cNvPr id="123" name="Shape 121"/>
+          <p:cNvPr id="122" name="Shape 120"/>
           <p:cNvSpPr/>
           <p:nvPr/>
         </p:nvSpPr>
@@ -11300,7 +11066,7 @@
       </p:sp>
       <p:sp>
         <p:nvSpPr>
-          <p:cNvPr id="124" name="Shape 122"/>
+          <p:cNvPr id="123" name="Shape 121"/>
           <p:cNvSpPr/>
           <p:nvPr/>
         </p:nvSpPr>
@@ -11327,7 +11093,7 @@
       </p:sp>
       <p:sp>
         <p:nvSpPr>
-          <p:cNvPr id="125" name="Shape 123"/>
+          <p:cNvPr id="124" name="Shape 122"/>
           <p:cNvSpPr/>
           <p:nvPr/>
         </p:nvSpPr>
@@ -11354,7 +11120,7 @@
       </p:sp>
       <p:sp>
         <p:nvSpPr>
-          <p:cNvPr id="126" name="Shape 124"/>
+          <p:cNvPr id="125" name="Shape 123"/>
           <p:cNvSpPr/>
           <p:nvPr/>
         </p:nvSpPr>
@@ -11381,7 +11147,7 @@
       </p:sp>
       <p:sp>
         <p:nvSpPr>
-          <p:cNvPr id="127" name="Shape 125"/>
+          <p:cNvPr id="126" name="Shape 124"/>
           <p:cNvSpPr/>
           <p:nvPr/>
         </p:nvSpPr>
@@ -11408,7 +11174,7 @@
       </p:sp>
       <p:sp>
         <p:nvSpPr>
-          <p:cNvPr id="128" name="Shape 126"/>
+          <p:cNvPr id="127" name="Shape 125"/>
           <p:cNvSpPr/>
           <p:nvPr/>
         </p:nvSpPr>
@@ -11435,7 +11201,7 @@
       </p:sp>
       <p:sp>
         <p:nvSpPr>
-          <p:cNvPr id="129" name="Shape 127"/>
+          <p:cNvPr id="128" name="Shape 126"/>
           <p:cNvSpPr/>
           <p:nvPr/>
         </p:nvSpPr>
@@ -11462,7 +11228,7 @@
       </p:sp>
       <p:sp>
         <p:nvSpPr>
-          <p:cNvPr id="130" name="Shape 128"/>
+          <p:cNvPr id="129" name="Shape 127"/>
           <p:cNvSpPr/>
           <p:nvPr/>
         </p:nvSpPr>
@@ -11489,7 +11255,7 @@
       </p:sp>
       <p:sp>
         <p:nvSpPr>
-          <p:cNvPr id="131" name="Shape 129"/>
+          <p:cNvPr id="130" name="Shape 128"/>
           <p:cNvSpPr/>
           <p:nvPr/>
         </p:nvSpPr>
@@ -11516,7 +11282,7 @@
       </p:sp>
       <p:sp>
         <p:nvSpPr>
-          <p:cNvPr id="132" name="Shape 130"/>
+          <p:cNvPr id="131" name="Shape 129"/>
           <p:cNvSpPr/>
           <p:nvPr/>
         </p:nvSpPr>
@@ -11543,7 +11309,7 @@
       </p:sp>
       <p:sp>
         <p:nvSpPr>
-          <p:cNvPr id="133" name="Shape 131"/>
+          <p:cNvPr id="132" name="Shape 130"/>
           <p:cNvSpPr/>
           <p:nvPr/>
         </p:nvSpPr>
@@ -11570,7 +11336,7 @@
       </p:sp>
       <p:sp>
         <p:nvSpPr>
-          <p:cNvPr id="134" name="Shape 132"/>
+          <p:cNvPr id="133" name="Shape 131"/>
           <p:cNvSpPr/>
           <p:nvPr/>
         </p:nvSpPr>
@@ -11597,7 +11363,7 @@
       </p:sp>
       <p:sp>
         <p:nvSpPr>
-          <p:cNvPr id="135" name="Shape 133"/>
+          <p:cNvPr id="134" name="Shape 132"/>
           <p:cNvSpPr/>
           <p:nvPr/>
         </p:nvSpPr>
@@ -11624,7 +11390,7 @@
       </p:sp>
       <p:sp>
         <p:nvSpPr>
-          <p:cNvPr id="136" name="Shape 134"/>
+          <p:cNvPr id="135" name="Shape 133"/>
           <p:cNvSpPr/>
           <p:nvPr/>
         </p:nvSpPr>
@@ -11651,7 +11417,7 @@
       </p:sp>
       <p:sp>
         <p:nvSpPr>
-          <p:cNvPr id="137" name="Shape 135"/>
+          <p:cNvPr id="136" name="Shape 134"/>
           <p:cNvSpPr/>
           <p:nvPr/>
         </p:nvSpPr>
@@ -11678,7 +11444,7 @@
       </p:sp>
       <p:sp>
         <p:nvSpPr>
-          <p:cNvPr id="138" name="Shape 136"/>
+          <p:cNvPr id="137" name="Shape 135"/>
           <p:cNvSpPr/>
           <p:nvPr/>
         </p:nvSpPr>
@@ -11705,7 +11471,7 @@
       </p:sp>
       <p:sp>
         <p:nvSpPr>
-          <p:cNvPr id="139" name="Shape 137"/>
+          <p:cNvPr id="138" name="Shape 136"/>
           <p:cNvSpPr/>
           <p:nvPr/>
         </p:nvSpPr>
@@ -11732,7 +11498,7 @@
       </p:sp>
       <p:sp>
         <p:nvSpPr>
-          <p:cNvPr id="140" name="Shape 138"/>
+          <p:cNvPr id="139" name="Shape 137"/>
           <p:cNvSpPr/>
           <p:nvPr/>
         </p:nvSpPr>
@@ -11759,7 +11525,7 @@
       </p:sp>
       <p:sp>
         <p:nvSpPr>
-          <p:cNvPr id="141" name="Shape 139"/>
+          <p:cNvPr id="140" name="Shape 138"/>
           <p:cNvSpPr/>
           <p:nvPr/>
         </p:nvSpPr>
@@ -11786,7 +11552,7 @@
       </p:sp>
       <p:sp>
         <p:nvSpPr>
-          <p:cNvPr id="142" name="Shape 140"/>
+          <p:cNvPr id="141" name="Shape 139"/>
           <p:cNvSpPr/>
           <p:nvPr/>
         </p:nvSpPr>
@@ -11813,7 +11579,7 @@
       </p:sp>
       <p:sp>
         <p:nvSpPr>
-          <p:cNvPr id="143" name="Shape 141"/>
+          <p:cNvPr id="142" name="Shape 140"/>
           <p:cNvSpPr/>
           <p:nvPr/>
         </p:nvSpPr>
@@ -11840,7 +11606,7 @@
       </p:sp>
       <p:sp>
         <p:nvSpPr>
-          <p:cNvPr id="144" name="Shape 142"/>
+          <p:cNvPr id="143" name="Shape 141"/>
           <p:cNvSpPr/>
           <p:nvPr/>
         </p:nvSpPr>
@@ -11867,7 +11633,7 @@
       </p:sp>
       <p:sp>
         <p:nvSpPr>
-          <p:cNvPr id="145" name="Shape 143"/>
+          <p:cNvPr id="144" name="Shape 142"/>
           <p:cNvSpPr/>
           <p:nvPr/>
         </p:nvSpPr>
@@ -11894,7 +11660,7 @@
       </p:sp>
       <p:sp>
         <p:nvSpPr>
-          <p:cNvPr id="146" name="Shape 144"/>
+          <p:cNvPr id="145" name="Shape 143"/>
           <p:cNvSpPr/>
           <p:nvPr/>
         </p:nvSpPr>
@@ -11921,7 +11687,7 @@
       </p:sp>
       <p:sp>
         <p:nvSpPr>
-          <p:cNvPr id="147" name="Shape 145"/>
+          <p:cNvPr id="146" name="Shape 144"/>
           <p:cNvSpPr/>
           <p:nvPr/>
         </p:nvSpPr>
@@ -11948,7 +11714,7 @@
       </p:sp>
       <p:sp>
         <p:nvSpPr>
-          <p:cNvPr id="148" name="Shape 146"/>
+          <p:cNvPr id="147" name="Shape 145"/>
           <p:cNvSpPr/>
           <p:nvPr/>
         </p:nvSpPr>
@@ -11975,7 +11741,7 @@
       </p:sp>
       <p:sp>
         <p:nvSpPr>
-          <p:cNvPr id="149" name="Shape 147"/>
+          <p:cNvPr id="148" name="Shape 146"/>
           <p:cNvSpPr/>
           <p:nvPr/>
         </p:nvSpPr>
@@ -12002,7 +11768,7 @@
       </p:sp>
       <p:sp>
         <p:nvSpPr>
-          <p:cNvPr id="150" name="Shape 148"/>
+          <p:cNvPr id="149" name="Shape 147"/>
           <p:cNvSpPr/>
           <p:nvPr/>
         </p:nvSpPr>
@@ -12029,7 +11795,7 @@
       </p:sp>
       <p:sp>
         <p:nvSpPr>
-          <p:cNvPr id="151" name="Shape 149"/>
+          <p:cNvPr id="150" name="Shape 148"/>
           <p:cNvSpPr/>
           <p:nvPr/>
         </p:nvSpPr>
@@ -12056,7 +11822,7 @@
       </p:sp>
       <p:sp>
         <p:nvSpPr>
-          <p:cNvPr id="152" name="Shape 150"/>
+          <p:cNvPr id="151" name="Shape 149"/>
           <p:cNvSpPr/>
           <p:nvPr/>
         </p:nvSpPr>
@@ -12083,7 +11849,7 @@
       </p:sp>
       <p:sp>
         <p:nvSpPr>
-          <p:cNvPr id="153" name="Shape 151"/>
+          <p:cNvPr id="152" name="Shape 150"/>
           <p:cNvSpPr/>
           <p:nvPr/>
         </p:nvSpPr>
@@ -12110,7 +11876,7 @@
       </p:sp>
       <p:sp>
         <p:nvSpPr>
-          <p:cNvPr id="154" name="Shape 152"/>
+          <p:cNvPr id="153" name="Shape 151"/>
           <p:cNvSpPr/>
           <p:nvPr/>
         </p:nvSpPr>
@@ -12137,7 +11903,7 @@
       </p:sp>
       <p:sp>
         <p:nvSpPr>
-          <p:cNvPr id="155" name="Shape 153"/>
+          <p:cNvPr id="154" name="Shape 152"/>
           <p:cNvSpPr/>
           <p:nvPr/>
         </p:nvSpPr>
@@ -12164,7 +11930,7 @@
       </p:sp>
       <p:sp>
         <p:nvSpPr>
-          <p:cNvPr id="156" name="Shape 154"/>
+          <p:cNvPr id="155" name="Shape 153"/>
           <p:cNvSpPr/>
           <p:nvPr/>
         </p:nvSpPr>
@@ -12191,7 +11957,7 @@
       </p:sp>
       <p:sp>
         <p:nvSpPr>
-          <p:cNvPr id="157" name="Shape 155"/>
+          <p:cNvPr id="156" name="Shape 154"/>
           <p:cNvSpPr/>
           <p:nvPr/>
         </p:nvSpPr>
@@ -12218,7 +11984,7 @@
       </p:sp>
       <p:sp>
         <p:nvSpPr>
-          <p:cNvPr id="158" name="Shape 156"/>
+          <p:cNvPr id="157" name="Shape 155"/>
           <p:cNvSpPr/>
           <p:nvPr/>
         </p:nvSpPr>
@@ -12245,7 +12011,7 @@
       </p:sp>
       <p:sp>
         <p:nvSpPr>
-          <p:cNvPr id="159" name="Shape 157"/>
+          <p:cNvPr id="158" name="Shape 156"/>
           <p:cNvSpPr/>
           <p:nvPr/>
         </p:nvSpPr>
@@ -12272,7 +12038,7 @@
       </p:sp>
       <p:sp>
         <p:nvSpPr>
-          <p:cNvPr id="160" name="Shape 158"/>
+          <p:cNvPr id="159" name="Shape 157"/>
           <p:cNvSpPr/>
           <p:nvPr/>
         </p:nvSpPr>
@@ -12299,7 +12065,7 @@
       </p:sp>
       <p:sp>
         <p:nvSpPr>
-          <p:cNvPr id="161" name="Shape 159"/>
+          <p:cNvPr id="160" name="Shape 158"/>
           <p:cNvSpPr/>
           <p:nvPr/>
         </p:nvSpPr>
@@ -12326,7 +12092,7 @@
       </p:sp>
       <p:sp>
         <p:nvSpPr>
-          <p:cNvPr id="162" name="Shape 160"/>
+          <p:cNvPr id="161" name="Shape 159"/>
           <p:cNvSpPr/>
           <p:nvPr/>
         </p:nvSpPr>
@@ -12353,7 +12119,7 @@
       </p:sp>
       <p:sp>
         <p:nvSpPr>
-          <p:cNvPr id="163" name="Shape 161"/>
+          <p:cNvPr id="162" name="Shape 160"/>
           <p:cNvSpPr/>
           <p:nvPr/>
         </p:nvSpPr>
@@ -12380,7 +12146,7 @@
       </p:sp>
       <p:sp>
         <p:nvSpPr>
-          <p:cNvPr id="164" name="Shape 162"/>
+          <p:cNvPr id="163" name="Shape 161"/>
           <p:cNvSpPr/>
           <p:nvPr/>
         </p:nvSpPr>
@@ -12407,7 +12173,7 @@
       </p:sp>
       <p:sp>
         <p:nvSpPr>
-          <p:cNvPr id="165" name="Shape 163"/>
+          <p:cNvPr id="164" name="Shape 162"/>
           <p:cNvSpPr/>
           <p:nvPr/>
         </p:nvSpPr>
@@ -12432,7 +12198,7 @@
       </p:sp>
       <p:sp>
         <p:nvSpPr>
-          <p:cNvPr id="166" name="Text 164"/>
+          <p:cNvPr id="165" name="Text 163"/>
           <p:cNvSpPr txBox="1"/>
           <p:nvPr/>
         </p:nvSpPr>
@@ -12471,7 +12237,7 @@
       </p:sp>
       <p:sp>
         <p:nvSpPr>
-          <p:cNvPr id="167" name="Shape 165"/>
+          <p:cNvPr id="166" name="Shape 164"/>
           <p:cNvSpPr/>
           <p:nvPr/>
         </p:nvSpPr>
@@ -12496,7 +12262,7 @@
       </p:sp>
       <p:sp>
         <p:nvSpPr>
-          <p:cNvPr id="168" name="Text 166"/>
+          <p:cNvPr id="167" name="Text 165"/>
           <p:cNvSpPr txBox="1"/>
           <p:nvPr/>
         </p:nvSpPr>
@@ -12535,7 +12301,7 @@
       </p:sp>
       <p:sp>
         <p:nvSpPr>
-          <p:cNvPr id="169" name="Shape 167"/>
+          <p:cNvPr id="168" name="Shape 166"/>
           <p:cNvSpPr/>
           <p:nvPr/>
         </p:nvSpPr>
@@ -12569,7 +12335,7 @@
       </p:sp>
       <p:sp>
         <p:nvSpPr>
-          <p:cNvPr id="170" name="Text 168"/>
+          <p:cNvPr id="169" name="Text 167"/>
           <p:cNvSpPr txBox="1"/>
           <p:nvPr/>
         </p:nvSpPr>
@@ -12608,7 +12374,7 @@
       </p:sp>
       <p:sp>
         <p:nvSpPr>
-          <p:cNvPr id="171" name="Shape 169"/>
+          <p:cNvPr id="170" name="Shape 168"/>
           <p:cNvSpPr/>
           <p:nvPr/>
         </p:nvSpPr>
@@ -12633,7 +12399,7 @@
       </p:sp>
       <p:sp>
         <p:nvSpPr>
-          <p:cNvPr id="172" name="Text 170"/>
+          <p:cNvPr id="171" name="Text 169"/>
           <p:cNvSpPr txBox="1"/>
           <p:nvPr/>
         </p:nvSpPr>
@@ -12672,7 +12438,7 @@
       </p:sp>
       <p:sp>
         <p:nvSpPr>
-          <p:cNvPr id="173" name="Shape 171"/>
+          <p:cNvPr id="172" name="Shape 170"/>
           <p:cNvSpPr/>
           <p:nvPr/>
         </p:nvSpPr>
@@ -12697,7 +12463,7 @@
       </p:sp>
       <p:sp>
         <p:nvSpPr>
-          <p:cNvPr id="174" name="Text 172"/>
+          <p:cNvPr id="173" name="Text 171"/>
           <p:cNvSpPr txBox="1"/>
           <p:nvPr/>
         </p:nvSpPr>
@@ -12736,7 +12502,7 @@
       </p:sp>
       <p:sp>
         <p:nvSpPr>
-          <p:cNvPr id="175" name="Shape 173"/>
+          <p:cNvPr id="174" name="Shape 172"/>
           <p:cNvSpPr/>
           <p:nvPr/>
         </p:nvSpPr>
@@ -12761,7 +12527,7 @@
       </p:sp>
       <p:sp>
         <p:nvSpPr>
-          <p:cNvPr id="176" name="Text 174"/>
+          <p:cNvPr id="175" name="Text 173"/>
           <p:cNvSpPr txBox="1"/>
           <p:nvPr/>
         </p:nvSpPr>
@@ -12800,7 +12566,7 @@
       </p:sp>
       <p:pic>
         <p:nvPicPr>
-          <p:cNvPr id="177" name="Image 0" descr="preencoded.png">    </p:cNvPr>
+          <p:cNvPr id="176" name="Image 0" descr="preencoded.png">    </p:cNvPr>
           <p:cNvPicPr>
             <a:picLocks noChangeAspect="1"/>
           </p:cNvPicPr>
@@ -12824,7 +12590,7 @@
       </p:pic>
       <p:sp>
         <p:nvSpPr>
-          <p:cNvPr id="178" name="Text 175"/>
+          <p:cNvPr id="177" name="Text 174"/>
           <p:cNvSpPr txBox="1"/>
           <p:nvPr/>
         </p:nvSpPr>
@@ -12863,7 +12629,7 @@
       </p:sp>
       <p:sp>
         <p:nvSpPr>
-          <p:cNvPr id="179" name="Text 176"/>
+          <p:cNvPr id="178" name="Text 175"/>
           <p:cNvSpPr txBox="1"/>
           <p:nvPr/>
         </p:nvSpPr>
@@ -12902,7 +12668,7 @@
       </p:sp>
       <p:sp>
         <p:nvSpPr>
-          <p:cNvPr id="180" name="Text 177"/>
+          <p:cNvPr id="179" name="Text 176"/>
           <p:cNvSpPr txBox="1"/>
           <p:nvPr/>
         </p:nvSpPr>
@@ -12979,7 +12745,7 @@
         </p:nvSpPr>
         <p:spPr>
           <a:xfrm>
-            <a:off x="658368" y="548640"/>
+            <a:off x="658368" y="749808"/>
             <a:ext cx="10874959" cy="786384"/>
           </a:xfrm>
           <a:prstGeom prst="rect">
@@ -13012,46 +12778,7 @@
       </p:sp>
       <p:sp>
         <p:nvSpPr>
-          <p:cNvPr id="3" name="Text 1"/>
-          <p:cNvSpPr txBox="1"/>
-          <p:nvPr/>
-        </p:nvSpPr>
-        <p:spPr>
-          <a:xfrm>
-            <a:off x="658368" y="1335024"/>
-            <a:ext cx="9777679" cy="310896"/>
-          </a:xfrm>
-          <a:prstGeom prst="rect">
-            <a:avLst/>
-          </a:prstGeom>
-          <a:noFill/>
-          <a:ln/>
-        </p:spPr>
-        <p:txBody>
-          <a:bodyPr wrap="square" lIns="0" tIns="0" rIns="0" bIns="0" rtlCol="0" anchor="ctr"/>
-          <a:lstStyle/>
-          <a:p>
-            <a:pPr indent="0" marL="0">
-              <a:buNone/>
-            </a:pPr>
-            <a:r>
-              <a:rPr lang="en-US" sz="1350" dirty="0">
-                <a:solidFill>
-                  <a:srgbClr val="3E5147"/>
-                </a:solidFill>
-                <a:latin typeface="Montserrat" pitchFamily="34" charset="0"/>
-                <a:ea typeface="Montserrat" pitchFamily="34" charset="-122"/>
-                <a:cs typeface="Montserrat" pitchFamily="34" charset="-120"/>
-              </a:rPr>
-              <a:t>Два контура на старте, положительный баланс в год и запас при урезанном бюджете.</a:t>
-            </a:r>
-            <a:endParaRPr lang="en-US" sz="1350" dirty="0"/>
-          </a:p>
-        </p:txBody>
-      </p:sp>
-      <p:sp>
-        <p:nvSpPr>
-          <p:cNvPr id="4" name="Shape 2"/>
+          <p:cNvPr id="3" name="Shape 1"/>
           <p:cNvSpPr/>
           <p:nvPr/>
         </p:nvSpPr>
@@ -13085,7 +12812,7 @@
       </p:sp>
       <p:sp>
         <p:nvSpPr>
-          <p:cNvPr id="5" name="Text 3"/>
+          <p:cNvPr id="4" name="Text 2"/>
           <p:cNvSpPr txBox="1"/>
           <p:nvPr/>
         </p:nvSpPr>
@@ -13124,7 +12851,7 @@
       </p:sp>
       <p:pic>
         <p:nvPicPr>
-          <p:cNvPr id="6" name="Image 0" descr="preencoded.png">    </p:cNvPr>
+          <p:cNvPr id="5" name="Image 0" descr="preencoded.png">    </p:cNvPr>
           <p:cNvPicPr>
             <a:picLocks noChangeAspect="1"/>
           </p:cNvPicPr>
@@ -13148,7 +12875,7 @@
       </p:pic>
       <p:pic>
         <p:nvPicPr>
-          <p:cNvPr id="7" name="Image 1" descr="preencoded.png">    </p:cNvPr>
+          <p:cNvPr id="6" name="Image 1" descr="preencoded.png">    </p:cNvPr>
           <p:cNvPicPr>
             <a:picLocks noChangeAspect="1"/>
           </p:cNvPicPr>
@@ -13172,7 +12899,7 @@
       </p:pic>
       <p:sp>
         <p:nvSpPr>
-          <p:cNvPr id="8" name="Text 4"/>
+          <p:cNvPr id="7" name="Text 3"/>
           <p:cNvSpPr txBox="1"/>
           <p:nvPr/>
         </p:nvSpPr>
@@ -13211,7 +12938,7 @@
       </p:sp>
       <p:sp>
         <p:nvSpPr>
-          <p:cNvPr id="9" name="Text 5"/>
+          <p:cNvPr id="8" name="Text 4"/>
           <p:cNvSpPr txBox="1"/>
           <p:nvPr/>
         </p:nvSpPr>
@@ -13250,7 +12977,7 @@
       </p:sp>
       <p:sp>
         <p:nvSpPr>
-          <p:cNvPr id="10" name="Text 6"/>
+          <p:cNvPr id="9" name="Text 5"/>
           <p:cNvSpPr txBox="1"/>
           <p:nvPr/>
         </p:nvSpPr>
@@ -13289,7 +13016,7 @@
       </p:sp>
       <p:sp>
         <p:nvSpPr>
-          <p:cNvPr id="11" name="Text 7"/>
+          <p:cNvPr id="10" name="Text 6"/>
           <p:cNvSpPr txBox="1"/>
           <p:nvPr/>
         </p:nvSpPr>
@@ -13328,7 +13055,7 @@
       </p:sp>
       <p:sp>
         <p:nvSpPr>
-          <p:cNvPr id="12" name="Shape 8"/>
+          <p:cNvPr id="11" name="Shape 7"/>
           <p:cNvSpPr/>
           <p:nvPr/>
         </p:nvSpPr>
@@ -13362,7 +13089,7 @@
       </p:sp>
       <p:sp>
         <p:nvSpPr>
-          <p:cNvPr id="13" name="Text 9"/>
+          <p:cNvPr id="12" name="Text 8"/>
           <p:cNvSpPr txBox="1"/>
           <p:nvPr/>
         </p:nvSpPr>
@@ -13401,7 +13128,7 @@
       </p:sp>
       <p:pic>
         <p:nvPicPr>
-          <p:cNvPr id="14" name="Image 2" descr="preencoded.png">    </p:cNvPr>
+          <p:cNvPr id="13" name="Image 2" descr="preencoded.png">    </p:cNvPr>
           <p:cNvPicPr>
             <a:picLocks noChangeAspect="1"/>
           </p:cNvPicPr>
@@ -13425,7 +13152,7 @@
       </p:pic>
       <p:sp>
         <p:nvSpPr>
-          <p:cNvPr id="15" name="Text 10"/>
+          <p:cNvPr id="14" name="Text 9"/>
           <p:cNvSpPr txBox="1"/>
           <p:nvPr/>
         </p:nvSpPr>
@@ -13464,7 +13191,7 @@
       </p:sp>
       <p:sp>
         <p:nvSpPr>
-          <p:cNvPr id="16" name="Text 11"/>
+          <p:cNvPr id="15" name="Text 10"/>
           <p:cNvSpPr txBox="1"/>
           <p:nvPr/>
         </p:nvSpPr>
@@ -13503,7 +13230,7 @@
       </p:sp>
       <p:pic>
         <p:nvPicPr>
-          <p:cNvPr id="17" name="Image 3" descr="preencoded.png">    </p:cNvPr>
+          <p:cNvPr id="16" name="Image 3" descr="preencoded.png">    </p:cNvPr>
           <p:cNvPicPr>
             <a:picLocks noChangeAspect="1"/>
           </p:cNvPicPr>
@@ -13527,7 +13254,7 @@
       </p:pic>
       <p:sp>
         <p:nvSpPr>
-          <p:cNvPr id="18" name="Text 12"/>
+          <p:cNvPr id="17" name="Text 11"/>
           <p:cNvSpPr txBox="1"/>
           <p:nvPr/>
         </p:nvSpPr>
@@ -13566,7 +13293,7 @@
       </p:sp>
       <p:sp>
         <p:nvSpPr>
-          <p:cNvPr id="19" name="Text 13"/>
+          <p:cNvPr id="18" name="Text 12"/>
           <p:cNvSpPr txBox="1"/>
           <p:nvPr/>
         </p:nvSpPr>
@@ -13605,7 +13332,7 @@
       </p:sp>
       <p:pic>
         <p:nvPicPr>
-          <p:cNvPr id="20" name="Image 4" descr="preencoded.png">    </p:cNvPr>
+          <p:cNvPr id="19" name="Image 4" descr="preencoded.png">    </p:cNvPr>
           <p:cNvPicPr>
             <a:picLocks noChangeAspect="1"/>
           </p:cNvPicPr>
@@ -13629,7 +13356,7 @@
       </p:pic>
       <p:sp>
         <p:nvSpPr>
-          <p:cNvPr id="21" name="Text 14"/>
+          <p:cNvPr id="20" name="Text 13"/>
           <p:cNvSpPr txBox="1"/>
           <p:nvPr/>
         </p:nvSpPr>
@@ -13668,7 +13395,7 @@
       </p:sp>
       <p:sp>
         <p:nvSpPr>
-          <p:cNvPr id="22" name="Shape 15"/>
+          <p:cNvPr id="21" name="Shape 14"/>
           <p:cNvSpPr/>
           <p:nvPr/>
         </p:nvSpPr>
@@ -13702,7 +13429,7 @@
       </p:sp>
       <p:sp>
         <p:nvSpPr>
-          <p:cNvPr id="23" name="Text 16"/>
+          <p:cNvPr id="22" name="Text 15"/>
           <p:cNvSpPr txBox="1"/>
           <p:nvPr/>
         </p:nvSpPr>
@@ -13741,7 +13468,7 @@
       </p:sp>
       <p:sp>
         <p:nvSpPr>
-          <p:cNvPr id="24" name="Shape 17"/>
+          <p:cNvPr id="23" name="Shape 16"/>
           <p:cNvSpPr/>
           <p:nvPr/>
         </p:nvSpPr>
@@ -13768,7 +13495,7 @@
       </p:sp>
       <p:pic>
         <p:nvPicPr>
-          <p:cNvPr id="25" name="Image 5" descr="preencoded.png">    </p:cNvPr>
+          <p:cNvPr id="24" name="Image 5" descr="preencoded.png">    </p:cNvPr>
           <p:cNvPicPr>
             <a:picLocks noChangeAspect="1"/>
           </p:cNvPicPr>
@@ -13792,7 +13519,7 @@
       </p:pic>
       <p:pic>
         <p:nvPicPr>
-          <p:cNvPr id="26" name="Image 6" descr="preencoded.png">    </p:cNvPr>
+          <p:cNvPr id="25" name="Image 6" descr="preencoded.png">    </p:cNvPr>
           <p:cNvPicPr>
             <a:picLocks noChangeAspect="1"/>
           </p:cNvPicPr>
@@ -13816,7 +13543,7 @@
       </p:pic>
       <p:sp>
         <p:nvSpPr>
-          <p:cNvPr id="27" name="Text 18"/>
+          <p:cNvPr id="26" name="Text 17"/>
           <p:cNvSpPr txBox="1"/>
           <p:nvPr/>
         </p:nvSpPr>
@@ -13855,7 +13582,7 @@
       </p:sp>
       <p:sp>
         <p:nvSpPr>
-          <p:cNvPr id="28" name="Shape 19"/>
+          <p:cNvPr id="27" name="Shape 18"/>
           <p:cNvSpPr/>
           <p:nvPr/>
         </p:nvSpPr>
@@ -13875,7 +13602,7 @@
       </p:sp>
       <p:sp>
         <p:nvSpPr>
-          <p:cNvPr id="29" name="Text 20"/>
+          <p:cNvPr id="28" name="Text 19"/>
           <p:cNvSpPr txBox="1"/>
           <p:nvPr/>
         </p:nvSpPr>
@@ -13914,7 +13641,7 @@
       </p:sp>
       <p:sp>
         <p:nvSpPr>
-          <p:cNvPr id="30" name="Shape 21"/>
+          <p:cNvPr id="29" name="Shape 20"/>
           <p:cNvSpPr/>
           <p:nvPr/>
         </p:nvSpPr>
@@ -13934,7 +13661,7 @@
       </p:sp>
       <p:sp>
         <p:nvSpPr>
-          <p:cNvPr id="31" name="Text 22"/>
+          <p:cNvPr id="30" name="Text 21"/>
           <p:cNvSpPr txBox="1"/>
           <p:nvPr/>
         </p:nvSpPr>
@@ -13973,7 +13700,7 @@
       </p:sp>
       <p:sp>
         <p:nvSpPr>
-          <p:cNvPr id="32" name="Text 23"/>
+          <p:cNvPr id="31" name="Text 22"/>
           <p:cNvSpPr txBox="1"/>
           <p:nvPr/>
         </p:nvSpPr>
@@ -14012,7 +13739,7 @@
       </p:sp>
       <p:sp>
         <p:nvSpPr>
-          <p:cNvPr id="33" name="Text 24"/>
+          <p:cNvPr id="32" name="Text 23"/>
           <p:cNvSpPr txBox="1"/>
           <p:nvPr/>
         </p:nvSpPr>
@@ -14051,7 +13778,7 @@
       </p:sp>
       <p:sp>
         <p:nvSpPr>
-          <p:cNvPr id="34" name="Text 25"/>
+          <p:cNvPr id="33" name="Text 24"/>
           <p:cNvSpPr txBox="1"/>
           <p:nvPr/>
         </p:nvSpPr>
@@ -14128,7 +13855,7 @@
         </p:nvSpPr>
         <p:spPr>
           <a:xfrm>
-            <a:off x="658368" y="548640"/>
+            <a:off x="658368" y="749808"/>
             <a:ext cx="10874959" cy="786384"/>
           </a:xfrm>
           <a:prstGeom prst="rect">
@@ -14161,46 +13888,7 @@
       </p:sp>
       <p:sp>
         <p:nvSpPr>
-          <p:cNvPr id="3" name="Text 1"/>
-          <p:cNvSpPr txBox="1"/>
-          <p:nvPr/>
-        </p:nvSpPr>
-        <p:spPr>
-          <a:xfrm>
-            <a:off x="658368" y="1335024"/>
-            <a:ext cx="9777679" cy="310896"/>
-          </a:xfrm>
-          <a:prstGeom prst="rect">
-            <a:avLst/>
-          </a:prstGeom>
-          <a:noFill/>
-          <a:ln/>
-        </p:spPr>
-        <p:txBody>
-          <a:bodyPr wrap="square" lIns="0" tIns="0" rIns="0" bIns="0" rtlCol="0" anchor="ctr"/>
-          <a:lstStyle/>
-          <a:p>
-            <a:pPr indent="0" marL="0">
-              <a:buNone/>
-            </a:pPr>
-            <a:r>
-              <a:rPr lang="en-US" sz="1350" dirty="0">
-                <a:solidFill>
-                  <a:srgbClr val="3E5147"/>
-                </a:solidFill>
-                <a:latin typeface="Montserrat" pitchFamily="34" charset="0"/>
-                <a:ea typeface="Montserrat" pitchFamily="34" charset="-122"/>
-                <a:cs typeface="Montserrat" pitchFamily="34" charset="-120"/>
-              </a:rPr>
-              <a:t>У каждого шага есть результат, ответственный и признак завершения.</a:t>
-            </a:r>
-            <a:endParaRPr lang="en-US" sz="1350" dirty="0"/>
-          </a:p>
-        </p:txBody>
-      </p:sp>
-      <p:sp>
-        <p:nvSpPr>
-          <p:cNvPr id="4" name="Shape 2"/>
+          <p:cNvPr id="3" name="Shape 1"/>
           <p:cNvSpPr/>
           <p:nvPr/>
         </p:nvSpPr>
@@ -14220,7 +13908,7 @@
       </p:sp>
       <p:sp>
         <p:nvSpPr>
-          <p:cNvPr id="5" name="Text 3"/>
+          <p:cNvPr id="4" name="Text 2"/>
           <p:cNvSpPr txBox="1"/>
           <p:nvPr/>
         </p:nvSpPr>
@@ -14259,7 +13947,7 @@
       </p:sp>
       <p:sp>
         <p:nvSpPr>
-          <p:cNvPr id="6" name="Shape 4"/>
+          <p:cNvPr id="5" name="Shape 3"/>
           <p:cNvSpPr/>
           <p:nvPr/>
         </p:nvSpPr>
@@ -14284,7 +13972,7 @@
       </p:sp>
       <p:sp>
         <p:nvSpPr>
-          <p:cNvPr id="7" name="Text 5"/>
+          <p:cNvPr id="6" name="Text 4"/>
           <p:cNvSpPr txBox="1"/>
           <p:nvPr/>
         </p:nvSpPr>
@@ -14323,7 +14011,7 @@
       </p:sp>
       <p:sp>
         <p:nvSpPr>
-          <p:cNvPr id="8" name="Shape 6"/>
+          <p:cNvPr id="7" name="Shape 5"/>
           <p:cNvSpPr/>
           <p:nvPr/>
         </p:nvSpPr>
@@ -14357,7 +14045,7 @@
       </p:sp>
       <p:pic>
         <p:nvPicPr>
-          <p:cNvPr id="9" name="Image 0" descr="preencoded.png">    </p:cNvPr>
+          <p:cNvPr id="8" name="Image 0" descr="preencoded.png">    </p:cNvPr>
           <p:cNvPicPr>
             <a:picLocks noChangeAspect="1"/>
           </p:cNvPicPr>
@@ -14381,7 +14069,7 @@
       </p:pic>
       <p:sp>
         <p:nvSpPr>
-          <p:cNvPr id="10" name="Text 7"/>
+          <p:cNvPr id="9" name="Text 6"/>
           <p:cNvSpPr txBox="1"/>
           <p:nvPr/>
         </p:nvSpPr>
@@ -14420,7 +14108,7 @@
       </p:sp>
       <p:sp>
         <p:nvSpPr>
-          <p:cNvPr id="11" name="Text 8"/>
+          <p:cNvPr id="10" name="Text 7"/>
           <p:cNvSpPr txBox="1"/>
           <p:nvPr/>
         </p:nvSpPr>
@@ -14459,7 +14147,7 @@
       </p:sp>
       <p:sp>
         <p:nvSpPr>
-          <p:cNvPr id="12" name="Text 9"/>
+          <p:cNvPr id="11" name="Text 8"/>
           <p:cNvSpPr txBox="1"/>
           <p:nvPr/>
         </p:nvSpPr>
@@ -14498,7 +14186,7 @@
       </p:sp>
       <p:sp>
         <p:nvSpPr>
-          <p:cNvPr id="13" name="Shape 10"/>
+          <p:cNvPr id="12" name="Shape 9"/>
           <p:cNvSpPr/>
           <p:nvPr/>
         </p:nvSpPr>
@@ -14523,7 +14211,7 @@
       </p:sp>
       <p:sp>
         <p:nvSpPr>
-          <p:cNvPr id="14" name="Text 11"/>
+          <p:cNvPr id="13" name="Text 10"/>
           <p:cNvSpPr txBox="1"/>
           <p:nvPr/>
         </p:nvSpPr>
@@ -14562,7 +14250,7 @@
       </p:sp>
       <p:sp>
         <p:nvSpPr>
-          <p:cNvPr id="15" name="Shape 12"/>
+          <p:cNvPr id="14" name="Shape 11"/>
           <p:cNvSpPr/>
           <p:nvPr/>
         </p:nvSpPr>
@@ -14596,7 +14284,7 @@
       </p:sp>
       <p:pic>
         <p:nvPicPr>
-          <p:cNvPr id="16" name="Image 1" descr="preencoded.png">    </p:cNvPr>
+          <p:cNvPr id="15" name="Image 1" descr="preencoded.png">    </p:cNvPr>
           <p:cNvPicPr>
             <a:picLocks noChangeAspect="1"/>
           </p:cNvPicPr>
@@ -14620,7 +14308,7 @@
       </p:pic>
       <p:sp>
         <p:nvSpPr>
-          <p:cNvPr id="17" name="Text 13"/>
+          <p:cNvPr id="16" name="Text 12"/>
           <p:cNvSpPr txBox="1"/>
           <p:nvPr/>
         </p:nvSpPr>
@@ -14659,7 +14347,7 @@
       </p:sp>
       <p:sp>
         <p:nvSpPr>
-          <p:cNvPr id="18" name="Text 14"/>
+          <p:cNvPr id="17" name="Text 13"/>
           <p:cNvSpPr txBox="1"/>
           <p:nvPr/>
         </p:nvSpPr>
@@ -14698,7 +14386,7 @@
       </p:sp>
       <p:sp>
         <p:nvSpPr>
-          <p:cNvPr id="19" name="Text 15"/>
+          <p:cNvPr id="18" name="Text 14"/>
           <p:cNvSpPr txBox="1"/>
           <p:nvPr/>
         </p:nvSpPr>
@@ -14737,7 +14425,7 @@
       </p:sp>
       <p:sp>
         <p:nvSpPr>
-          <p:cNvPr id="20" name="Shape 16"/>
+          <p:cNvPr id="19" name="Shape 15"/>
           <p:cNvSpPr/>
           <p:nvPr/>
         </p:nvSpPr>
@@ -14762,7 +14450,7 @@
       </p:sp>
       <p:sp>
         <p:nvSpPr>
-          <p:cNvPr id="21" name="Text 17"/>
+          <p:cNvPr id="20" name="Text 16"/>
           <p:cNvSpPr txBox="1"/>
           <p:nvPr/>
         </p:nvSpPr>
@@ -14801,7 +14489,7 @@
       </p:sp>
       <p:sp>
         <p:nvSpPr>
-          <p:cNvPr id="22" name="Shape 18"/>
+          <p:cNvPr id="21" name="Shape 17"/>
           <p:cNvSpPr/>
           <p:nvPr/>
         </p:nvSpPr>
@@ -14835,7 +14523,7 @@
       </p:sp>
       <p:pic>
         <p:nvPicPr>
-          <p:cNvPr id="23" name="Image 2" descr="preencoded.png">    </p:cNvPr>
+          <p:cNvPr id="22" name="Image 2" descr="preencoded.png">    </p:cNvPr>
           <p:cNvPicPr>
             <a:picLocks noChangeAspect="1"/>
           </p:cNvPicPr>
@@ -14859,7 +14547,7 @@
       </p:pic>
       <p:sp>
         <p:nvSpPr>
-          <p:cNvPr id="24" name="Text 19"/>
+          <p:cNvPr id="23" name="Text 18"/>
           <p:cNvSpPr txBox="1"/>
           <p:nvPr/>
         </p:nvSpPr>
@@ -14898,7 +14586,7 @@
       </p:sp>
       <p:sp>
         <p:nvSpPr>
-          <p:cNvPr id="25" name="Text 20"/>
+          <p:cNvPr id="24" name="Text 19"/>
           <p:cNvSpPr txBox="1"/>
           <p:nvPr/>
         </p:nvSpPr>
@@ -14937,7 +14625,7 @@
       </p:sp>
       <p:sp>
         <p:nvSpPr>
-          <p:cNvPr id="26" name="Text 21"/>
+          <p:cNvPr id="25" name="Text 20"/>
           <p:cNvSpPr txBox="1"/>
           <p:nvPr/>
         </p:nvSpPr>
@@ -14976,7 +14664,7 @@
       </p:sp>
       <p:sp>
         <p:nvSpPr>
-          <p:cNvPr id="27" name="Shape 22"/>
+          <p:cNvPr id="26" name="Shape 21"/>
           <p:cNvSpPr/>
           <p:nvPr/>
         </p:nvSpPr>
@@ -15001,7 +14689,7 @@
       </p:sp>
       <p:sp>
         <p:nvSpPr>
-          <p:cNvPr id="28" name="Text 23"/>
+          <p:cNvPr id="27" name="Text 22"/>
           <p:cNvSpPr txBox="1"/>
           <p:nvPr/>
         </p:nvSpPr>
@@ -15040,7 +14728,7 @@
       </p:sp>
       <p:sp>
         <p:nvSpPr>
-          <p:cNvPr id="29" name="Shape 24"/>
+          <p:cNvPr id="28" name="Shape 23"/>
           <p:cNvSpPr/>
           <p:nvPr/>
         </p:nvSpPr>
@@ -15074,7 +14762,7 @@
       </p:sp>
       <p:pic>
         <p:nvPicPr>
-          <p:cNvPr id="30" name="Image 3" descr="preencoded.png">    </p:cNvPr>
+          <p:cNvPr id="29" name="Image 3" descr="preencoded.png">    </p:cNvPr>
           <p:cNvPicPr>
             <a:picLocks noChangeAspect="1"/>
           </p:cNvPicPr>
@@ -15098,7 +14786,7 @@
       </p:pic>
       <p:sp>
         <p:nvSpPr>
-          <p:cNvPr id="31" name="Text 25"/>
+          <p:cNvPr id="30" name="Text 24"/>
           <p:cNvSpPr txBox="1"/>
           <p:nvPr/>
         </p:nvSpPr>
@@ -15137,7 +14825,7 @@
       </p:sp>
       <p:sp>
         <p:nvSpPr>
-          <p:cNvPr id="32" name="Text 26"/>
+          <p:cNvPr id="31" name="Text 25"/>
           <p:cNvSpPr txBox="1"/>
           <p:nvPr/>
         </p:nvSpPr>
@@ -15176,7 +14864,7 @@
       </p:sp>
       <p:sp>
         <p:nvSpPr>
-          <p:cNvPr id="33" name="Text 27"/>
+          <p:cNvPr id="32" name="Text 26"/>
           <p:cNvSpPr txBox="1"/>
           <p:nvPr/>
         </p:nvSpPr>
@@ -15215,7 +14903,7 @@
       </p:sp>
       <p:sp>
         <p:nvSpPr>
-          <p:cNvPr id="34" name="Shape 28"/>
+          <p:cNvPr id="33" name="Shape 27"/>
           <p:cNvSpPr/>
           <p:nvPr/>
         </p:nvSpPr>
@@ -15240,7 +14928,7 @@
       </p:sp>
       <p:sp>
         <p:nvSpPr>
-          <p:cNvPr id="35" name="Text 29"/>
+          <p:cNvPr id="34" name="Text 28"/>
           <p:cNvSpPr txBox="1"/>
           <p:nvPr/>
         </p:nvSpPr>
@@ -15279,7 +14967,7 @@
       </p:sp>
       <p:sp>
         <p:nvSpPr>
-          <p:cNvPr id="36" name="Shape 30"/>
+          <p:cNvPr id="35" name="Shape 29"/>
           <p:cNvSpPr/>
           <p:nvPr/>
         </p:nvSpPr>
@@ -15313,7 +15001,7 @@
       </p:sp>
       <p:pic>
         <p:nvPicPr>
-          <p:cNvPr id="37" name="Image 4" descr="preencoded.png">    </p:cNvPr>
+          <p:cNvPr id="36" name="Image 4" descr="preencoded.png">    </p:cNvPr>
           <p:cNvPicPr>
             <a:picLocks noChangeAspect="1"/>
           </p:cNvPicPr>
@@ -15337,7 +15025,7 @@
       </p:pic>
       <p:sp>
         <p:nvSpPr>
-          <p:cNvPr id="38" name="Text 31"/>
+          <p:cNvPr id="37" name="Text 30"/>
           <p:cNvSpPr txBox="1"/>
           <p:nvPr/>
         </p:nvSpPr>
@@ -15376,7 +15064,7 @@
       </p:sp>
       <p:sp>
         <p:nvSpPr>
-          <p:cNvPr id="39" name="Text 32"/>
+          <p:cNvPr id="38" name="Text 31"/>
           <p:cNvSpPr txBox="1"/>
           <p:nvPr/>
         </p:nvSpPr>
@@ -15415,7 +15103,7 @@
       </p:sp>
       <p:sp>
         <p:nvSpPr>
-          <p:cNvPr id="40" name="Shape 33"/>
+          <p:cNvPr id="39" name="Shape 32"/>
           <p:cNvSpPr/>
           <p:nvPr/>
         </p:nvSpPr>
@@ -15449,7 +15137,7 @@
       </p:sp>
       <p:pic>
         <p:nvPicPr>
-          <p:cNvPr id="41" name="Image 5" descr="preencoded.png">    </p:cNvPr>
+          <p:cNvPr id="40" name="Image 5" descr="preencoded.png">    </p:cNvPr>
           <p:cNvPicPr>
             <a:picLocks noChangeAspect="1"/>
           </p:cNvPicPr>
@@ -15473,7 +15161,7 @@
       </p:pic>
       <p:sp>
         <p:nvSpPr>
-          <p:cNvPr id="42" name="Text 34"/>
+          <p:cNvPr id="41" name="Text 33"/>
           <p:cNvSpPr txBox="1"/>
           <p:nvPr/>
         </p:nvSpPr>
@@ -15512,7 +15200,7 @@
       </p:sp>
       <p:pic>
         <p:nvPicPr>
-          <p:cNvPr id="43" name="Image 6" descr="preencoded.png">    </p:cNvPr>
+          <p:cNvPr id="42" name="Image 6" descr="preencoded.png">    </p:cNvPr>
           <p:cNvPicPr>
             <a:picLocks noChangeAspect="1"/>
           </p:cNvPicPr>
@@ -15536,7 +15224,7 @@
       </p:pic>
       <p:sp>
         <p:nvSpPr>
-          <p:cNvPr id="44" name="Text 35"/>
+          <p:cNvPr id="43" name="Text 34"/>
           <p:cNvSpPr txBox="1"/>
           <p:nvPr/>
         </p:nvSpPr>
@@ -15575,7 +15263,7 @@
       </p:sp>
       <p:pic>
         <p:nvPicPr>
-          <p:cNvPr id="45" name="Image 7" descr="preencoded.png">    </p:cNvPr>
+          <p:cNvPr id="44" name="Image 7" descr="preencoded.png">    </p:cNvPr>
           <p:cNvPicPr>
             <a:picLocks noChangeAspect="1"/>
           </p:cNvPicPr>
@@ -15599,7 +15287,7 @@
       </p:pic>
       <p:sp>
         <p:nvSpPr>
-          <p:cNvPr id="46" name="Text 36"/>
+          <p:cNvPr id="45" name="Text 35"/>
           <p:cNvSpPr txBox="1"/>
           <p:nvPr/>
         </p:nvSpPr>
@@ -15638,7 +15326,7 @@
       </p:sp>
       <p:sp>
         <p:nvSpPr>
-          <p:cNvPr id="47" name="Text 37"/>
+          <p:cNvPr id="46" name="Text 36"/>
           <p:cNvSpPr txBox="1"/>
           <p:nvPr/>
         </p:nvSpPr>
@@ -15739,7 +15427,7 @@
         </p:nvSpPr>
         <p:spPr>
           <a:xfrm>
-            <a:off x="0" y="914400"/>
+            <a:off x="0" y="1042416"/>
             <a:ext cx="12191695" cy="822960"/>
           </a:xfrm>
           <a:prstGeom prst="rect">
@@ -15772,52 +15460,13 @@
       </p:sp>
       <p:sp>
         <p:nvSpPr>
-          <p:cNvPr id="4" name="Text 1"/>
-          <p:cNvSpPr txBox="1"/>
-          <p:nvPr/>
-        </p:nvSpPr>
-        <p:spPr>
-          <a:xfrm>
-            <a:off x="0" y="1755648"/>
-            <a:ext cx="12191695" cy="365760"/>
-          </a:xfrm>
-          <a:prstGeom prst="rect">
-            <a:avLst/>
-          </a:prstGeom>
-          <a:noFill/>
-          <a:ln/>
-        </p:spPr>
-        <p:txBody>
-          <a:bodyPr wrap="square" lIns="0" tIns="0" rIns="0" bIns="0" rtlCol="0" anchor="ctr"/>
-          <a:lstStyle/>
-          <a:p>
-            <a:pPr algn="ctr" indent="0" marL="0">
-              <a:buNone/>
-            </a:pPr>
-            <a:r>
-              <a:rPr lang="en-US" sz="1600" dirty="0">
-                <a:solidFill>
-                  <a:srgbClr val="3E5147"/>
-                </a:solidFill>
-                <a:latin typeface="Montserrat" pitchFamily="34" charset="0"/>
-                <a:ea typeface="Montserrat" pitchFamily="34" charset="-122"/>
-                <a:cs typeface="Montserrat" pitchFamily="34" charset="-120"/>
-              </a:rPr>
-              <a:t>Соберём портфель, сломаем его заменой лота и вернём обратно.</a:t>
-            </a:r>
-            <a:endParaRPr lang="en-US" sz="1600" dirty="0"/>
-          </a:p>
-        </p:txBody>
-      </p:sp>
-      <p:sp>
-        <p:nvSpPr>
-          <p:cNvPr id="5" name="Shape 2"/>
-          <p:cNvSpPr/>
-          <p:nvPr/>
-        </p:nvSpPr>
-        <p:spPr>
-          <a:xfrm>
-            <a:off x="4315968" y="2395728"/>
+          <p:cNvPr id="4" name="Shape 1"/>
+          <p:cNvSpPr/>
+          <p:nvPr/>
+        </p:nvSpPr>
+        <p:spPr>
+          <a:xfrm>
+            <a:off x="4315968" y="2267712"/>
             <a:ext cx="3566160" cy="3566160"/>
           </a:xfrm>
           <a:prstGeom prst="roundRect">
@@ -15845,7 +15494,7 @@
       </p:sp>
       <p:pic>
         <p:nvPicPr>
-          <p:cNvPr id="6" name="Image 1" descr="preencoded.png">    </p:cNvPr>
+          <p:cNvPr id="5" name="Image 1" descr="preencoded.png">    </p:cNvPr>
           <p:cNvPicPr>
             <a:picLocks noChangeAspect="1"/>
           </p:cNvPicPr>
@@ -15859,7 +15508,7 @@
         </p:blipFill>
         <p:spPr>
           <a:xfrm>
-            <a:off x="4599432" y="2679192"/>
+            <a:off x="4599432" y="2551176"/>
             <a:ext cx="2999232" cy="2999232"/>
           </a:xfrm>
           <a:prstGeom prst="rect">
@@ -15869,13 +15518,13 @@
       </p:pic>
       <p:sp>
         <p:nvSpPr>
-          <p:cNvPr id="7" name="Text 3"/>
-          <p:cNvSpPr txBox="1"/>
-          <p:nvPr/>
-        </p:nvSpPr>
-        <p:spPr>
-          <a:xfrm>
-            <a:off x="0" y="6108192"/>
+          <p:cNvPr id="6" name="Text 2"/>
+          <p:cNvSpPr txBox="1"/>
+          <p:nvPr/>
+        </p:nvSpPr>
+        <p:spPr>
+          <a:xfrm>
+            <a:off x="0" y="6016752"/>
             <a:ext cx="12191695" cy="402336"/>
           </a:xfrm>
           <a:prstGeom prst="rect">
@@ -15985,7 +15634,7 @@
         </p:nvSpPr>
         <p:spPr>
           <a:xfrm>
-            <a:off x="658368" y="548640"/>
+            <a:off x="658368" y="749808"/>
             <a:ext cx="10874959" cy="786384"/>
           </a:xfrm>
           <a:prstGeom prst="rect">
@@ -16013,51 +15662,12 @@
               <a:t>Портфель собирается за минуту</a:t>
             </a:r>
             <a:endParaRPr lang="en-US" sz="4000" dirty="0"/>
-          </a:p>
-        </p:txBody>
-      </p:sp>
-      <p:sp>
-        <p:nvSpPr>
-          <p:cNvPr id="4" name="Text 2"/>
-          <p:cNvSpPr txBox="1"/>
-          <p:nvPr/>
-        </p:nvSpPr>
-        <p:spPr>
-          <a:xfrm>
-            <a:off x="658368" y="1335024"/>
-            <a:ext cx="9777679" cy="310896"/>
-          </a:xfrm>
-          <a:prstGeom prst="rect">
-            <a:avLst/>
-          </a:prstGeom>
-          <a:noFill/>
-          <a:ln/>
-        </p:spPr>
-        <p:txBody>
-          <a:bodyPr wrap="square" lIns="0" tIns="0" rIns="0" bIns="0" rtlCol="0" anchor="ctr"/>
-          <a:lstStyle/>
-          <a:p>
-            <a:pPr indent="0" marL="0">
-              <a:buNone/>
-            </a:pPr>
-            <a:r>
-              <a:rPr lang="en-US" sz="1350" dirty="0">
-                <a:solidFill>
-                  <a:srgbClr val="3E5147"/>
-                </a:solidFill>
-                <a:latin typeface="Montserrat" pitchFamily="34" charset="0"/>
-                <a:ea typeface="Montserrat" pitchFamily="34" charset="-122"/>
-                <a:cs typeface="Montserrat" pitchFamily="34" charset="-120"/>
-              </a:rPr>
-              <a:t>Эксперт меняет состав и сразу видит новый результат.</a:t>
-            </a:r>
-            <a:endParaRPr lang="en-US" sz="1350" dirty="0"/>
           </a:p>
         </p:txBody>
       </p:sp>
       <p:pic>
         <p:nvPicPr>
-          <p:cNvPr id="5" name="Image 0" descr="preencoded.png">    </p:cNvPr>
+          <p:cNvPr id="4" name="Image 0" descr="preencoded.png">    </p:cNvPr>
           <p:cNvPicPr>
             <a:picLocks noChangeAspect="1"/>
           </p:cNvPicPr>
@@ -16081,7 +15691,7 @@
       </p:pic>
       <p:sp>
         <p:nvSpPr>
-          <p:cNvPr id="6" name="Text 3"/>
+          <p:cNvPr id="5" name="Text 2"/>
           <p:cNvSpPr txBox="1"/>
           <p:nvPr/>
         </p:nvSpPr>
@@ -16120,7 +15730,7 @@
       </p:sp>
       <p:sp>
         <p:nvSpPr>
-          <p:cNvPr id="7" name="Text 4"/>
+          <p:cNvPr id="6" name="Text 3"/>
           <p:cNvSpPr txBox="1"/>
           <p:nvPr/>
         </p:nvSpPr>
@@ -16159,7 +15769,7 @@
       </p:sp>
       <p:sp>
         <p:nvSpPr>
-          <p:cNvPr id="8" name="Shape 5"/>
+          <p:cNvPr id="7" name="Shape 4"/>
           <p:cNvSpPr/>
           <p:nvPr/>
         </p:nvSpPr>
@@ -16184,7 +15794,7 @@
       </p:sp>
       <p:pic>
         <p:nvPicPr>
-          <p:cNvPr id="9" name="Image 1" descr="preencoded.png">    </p:cNvPr>
+          <p:cNvPr id="8" name="Image 1" descr="preencoded.png">    </p:cNvPr>
           <p:cNvPicPr>
             <a:picLocks noChangeAspect="1"/>
           </p:cNvPicPr>
@@ -16208,7 +15818,7 @@
       </p:pic>
       <p:sp>
         <p:nvSpPr>
-          <p:cNvPr id="10" name="Text 6"/>
+          <p:cNvPr id="9" name="Text 5"/>
           <p:cNvSpPr txBox="1"/>
           <p:nvPr/>
         </p:nvSpPr>
@@ -16247,7 +15857,7 @@
       </p:sp>
       <p:sp>
         <p:nvSpPr>
-          <p:cNvPr id="11" name="Text 7"/>
+          <p:cNvPr id="10" name="Text 6"/>
           <p:cNvSpPr txBox="1"/>
           <p:nvPr/>
         </p:nvSpPr>
@@ -16286,7 +15896,7 @@
       </p:sp>
       <p:sp>
         <p:nvSpPr>
-          <p:cNvPr id="12" name="Shape 8"/>
+          <p:cNvPr id="11" name="Shape 7"/>
           <p:cNvSpPr/>
           <p:nvPr/>
         </p:nvSpPr>
@@ -16311,7 +15921,7 @@
       </p:sp>
       <p:pic>
         <p:nvPicPr>
-          <p:cNvPr id="13" name="Image 2" descr="preencoded.png">    </p:cNvPr>
+          <p:cNvPr id="12" name="Image 2" descr="preencoded.png">    </p:cNvPr>
           <p:cNvPicPr>
             <a:picLocks noChangeAspect="1"/>
           </p:cNvPicPr>
@@ -16335,7 +15945,7 @@
       </p:pic>
       <p:sp>
         <p:nvSpPr>
-          <p:cNvPr id="14" name="Text 9"/>
+          <p:cNvPr id="13" name="Text 8"/>
           <p:cNvSpPr txBox="1"/>
           <p:nvPr/>
         </p:nvSpPr>
@@ -16374,7 +15984,7 @@
       </p:sp>
       <p:sp>
         <p:nvSpPr>
-          <p:cNvPr id="15" name="Text 10"/>
+          <p:cNvPr id="14" name="Text 9"/>
           <p:cNvSpPr txBox="1"/>
           <p:nvPr/>
         </p:nvSpPr>
@@ -16413,7 +16023,7 @@
       </p:sp>
       <p:sp>
         <p:nvSpPr>
-          <p:cNvPr id="16" name="Shape 11"/>
+          <p:cNvPr id="15" name="Shape 10"/>
           <p:cNvSpPr/>
           <p:nvPr/>
         </p:nvSpPr>
@@ -16447,7 +16057,7 @@
       </p:sp>
       <p:sp>
         <p:nvSpPr>
-          <p:cNvPr id="17" name="Text 12"/>
+          <p:cNvPr id="16" name="Text 11"/>
           <p:cNvSpPr txBox="1"/>
           <p:nvPr/>
         </p:nvSpPr>
@@ -16486,7 +16096,7 @@
       </p:sp>
       <p:sp>
         <p:nvSpPr>
-          <p:cNvPr id="18" name="Text 13"/>
+          <p:cNvPr id="17" name="Text 12"/>
           <p:cNvSpPr txBox="1"/>
           <p:nvPr/>
         </p:nvSpPr>
@@ -16525,7 +16135,7 @@
       </p:sp>
       <p:sp>
         <p:nvSpPr>
-          <p:cNvPr id="19" name="Shape 14"/>
+          <p:cNvPr id="18" name="Shape 13"/>
           <p:cNvSpPr/>
           <p:nvPr/>
         </p:nvSpPr>
@@ -16550,7 +16160,7 @@
       </p:sp>
       <p:sp>
         <p:nvSpPr>
-          <p:cNvPr id="20" name="Text 15"/>
+          <p:cNvPr id="19" name="Text 14"/>
           <p:cNvSpPr txBox="1"/>
           <p:nvPr/>
         </p:nvSpPr>
@@ -16589,7 +16199,7 @@
       </p:sp>
       <p:sp>
         <p:nvSpPr>
-          <p:cNvPr id="21" name="Text 16"/>
+          <p:cNvPr id="20" name="Text 15"/>
           <p:cNvSpPr txBox="1"/>
           <p:nvPr/>
         </p:nvSpPr>
@@ -16628,7 +16238,7 @@
       </p:sp>
       <p:sp>
         <p:nvSpPr>
-          <p:cNvPr id="22" name="Shape 17"/>
+          <p:cNvPr id="21" name="Shape 16"/>
           <p:cNvSpPr/>
           <p:nvPr/>
         </p:nvSpPr>
@@ -16653,7 +16263,7 @@
       </p:sp>
       <p:sp>
         <p:nvSpPr>
-          <p:cNvPr id="23" name="Text 18"/>
+          <p:cNvPr id="22" name="Text 17"/>
           <p:cNvSpPr txBox="1"/>
           <p:nvPr/>
         </p:nvSpPr>
@@ -16692,7 +16302,7 @@
       </p:sp>
       <p:sp>
         <p:nvSpPr>
-          <p:cNvPr id="24" name="Text 19"/>
+          <p:cNvPr id="23" name="Text 18"/>
           <p:cNvSpPr txBox="1"/>
           <p:nvPr/>
         </p:nvSpPr>
@@ -16731,7 +16341,7 @@
       </p:sp>
       <p:sp>
         <p:nvSpPr>
-          <p:cNvPr id="25" name="Shape 20"/>
+          <p:cNvPr id="24" name="Shape 19"/>
           <p:cNvSpPr/>
           <p:nvPr/>
         </p:nvSpPr>
@@ -16756,7 +16366,7 @@
       </p:sp>
       <p:sp>
         <p:nvSpPr>
-          <p:cNvPr id="26" name="Text 21"/>
+          <p:cNvPr id="25" name="Text 20"/>
           <p:cNvSpPr txBox="1"/>
           <p:nvPr/>
         </p:nvSpPr>
@@ -16795,7 +16405,7 @@
       </p:sp>
       <p:sp>
         <p:nvSpPr>
-          <p:cNvPr id="27" name="Text 22"/>
+          <p:cNvPr id="26" name="Text 21"/>
           <p:cNvSpPr txBox="1"/>
           <p:nvPr/>
         </p:nvSpPr>
@@ -16834,7 +16444,7 @@
       </p:sp>
       <p:sp>
         <p:nvSpPr>
-          <p:cNvPr id="28" name="Shape 23"/>
+          <p:cNvPr id="27" name="Shape 22"/>
           <p:cNvSpPr/>
           <p:nvPr/>
         </p:nvSpPr>
@@ -16859,7 +16469,7 @@
       </p:sp>
       <p:sp>
         <p:nvSpPr>
-          <p:cNvPr id="29" name="Text 24"/>
+          <p:cNvPr id="28" name="Text 23"/>
           <p:cNvSpPr txBox="1"/>
           <p:nvPr/>
         </p:nvSpPr>
@@ -16898,7 +16508,7 @@
       </p:sp>
       <p:sp>
         <p:nvSpPr>
-          <p:cNvPr id="30" name="Text 25"/>
+          <p:cNvPr id="29" name="Text 24"/>
           <p:cNvSpPr txBox="1"/>
           <p:nvPr/>
         </p:nvSpPr>
@@ -17014,7 +16624,7 @@
         </p:nvSpPr>
         <p:spPr>
           <a:xfrm>
-            <a:off x="658368" y="548640"/>
+            <a:off x="658368" y="749808"/>
             <a:ext cx="10874959" cy="786384"/>
           </a:xfrm>
           <a:prstGeom prst="rect">
@@ -17047,46 +16657,7 @@
       </p:sp>
       <p:sp>
         <p:nvSpPr>
-          <p:cNvPr id="4" name="Text 2"/>
-          <p:cNvSpPr txBox="1"/>
-          <p:nvPr/>
-        </p:nvSpPr>
-        <p:spPr>
-          <a:xfrm>
-            <a:off x="658368" y="1335024"/>
-            <a:ext cx="9777679" cy="310896"/>
-          </a:xfrm>
-          <a:prstGeom prst="rect">
-            <a:avLst/>
-          </a:prstGeom>
-          <a:noFill/>
-          <a:ln/>
-        </p:spPr>
-        <p:txBody>
-          <a:bodyPr wrap="square" lIns="0" tIns="0" rIns="0" bIns="0" rtlCol="0" anchor="ctr"/>
-          <a:lstStyle/>
-          <a:p>
-            <a:pPr indent="0" marL="0">
-              <a:buNone/>
-            </a:pPr>
-            <a:r>
-              <a:rPr lang="en-US" sz="1350" dirty="0">
-                <a:solidFill>
-                  <a:srgbClr val="3E5147"/>
-                </a:solidFill>
-                <a:latin typeface="Montserrat" pitchFamily="34" charset="0"/>
-                <a:ea typeface="Montserrat" pitchFamily="34" charset="-122"/>
-                <a:cs typeface="Montserrat" pitchFamily="34" charset="-120"/>
-              </a:rPr>
-              <a:t>Инструмент показывает по каждому факт, предел и остаток.</a:t>
-            </a:r>
-            <a:endParaRPr lang="en-US" sz="1350" dirty="0"/>
-          </a:p>
-        </p:txBody>
-      </p:sp>
-      <p:sp>
-        <p:nvSpPr>
-          <p:cNvPr id="5" name="Shape 3"/>
+          <p:cNvPr id="4" name="Shape 2"/>
           <p:cNvSpPr/>
           <p:nvPr/>
         </p:nvSpPr>
@@ -17120,7 +16691,7 @@
       </p:sp>
       <p:sp>
         <p:nvSpPr>
-          <p:cNvPr id="6" name="Shape 4"/>
+          <p:cNvPr id="5" name="Shape 3"/>
           <p:cNvSpPr/>
           <p:nvPr/>
         </p:nvSpPr>
@@ -17145,7 +16716,7 @@
       </p:sp>
       <p:pic>
         <p:nvPicPr>
-          <p:cNvPr id="7" name="Image 0" descr="preencoded.png">    </p:cNvPr>
+          <p:cNvPr id="6" name="Image 0" descr="preencoded.png">    </p:cNvPr>
           <p:cNvPicPr>
             <a:picLocks noChangeAspect="1"/>
           </p:cNvPicPr>
@@ -17169,7 +16740,7 @@
       </p:pic>
       <p:sp>
         <p:nvSpPr>
-          <p:cNvPr id="8" name="Text 5"/>
+          <p:cNvPr id="7" name="Text 4"/>
           <p:cNvSpPr txBox="1"/>
           <p:nvPr/>
         </p:nvSpPr>
@@ -17208,7 +16779,7 @@
       </p:sp>
       <p:sp>
         <p:nvSpPr>
-          <p:cNvPr id="9" name="Text 6"/>
+          <p:cNvPr id="8" name="Text 5"/>
           <p:cNvSpPr txBox="1"/>
           <p:nvPr/>
         </p:nvSpPr>
@@ -17247,7 +16818,7 @@
       </p:sp>
       <p:sp>
         <p:nvSpPr>
-          <p:cNvPr id="10" name="Shape 7"/>
+          <p:cNvPr id="9" name="Shape 6"/>
           <p:cNvSpPr/>
           <p:nvPr/>
         </p:nvSpPr>
@@ -17274,7 +16845,7 @@
       </p:sp>
       <p:sp>
         <p:nvSpPr>
-          <p:cNvPr id="11" name="Shape 8"/>
+          <p:cNvPr id="10" name="Shape 7"/>
           <p:cNvSpPr/>
           <p:nvPr/>
         </p:nvSpPr>
@@ -17301,7 +16872,7 @@
       </p:sp>
       <p:sp>
         <p:nvSpPr>
-          <p:cNvPr id="12" name="Text 9"/>
+          <p:cNvPr id="11" name="Text 8"/>
           <p:cNvSpPr txBox="1"/>
           <p:nvPr/>
         </p:nvSpPr>
@@ -17340,7 +16911,7 @@
       </p:sp>
       <p:sp>
         <p:nvSpPr>
-          <p:cNvPr id="13" name="Shape 10"/>
+          <p:cNvPr id="12" name="Shape 9"/>
           <p:cNvSpPr/>
           <p:nvPr/>
         </p:nvSpPr>
@@ -17374,7 +16945,7 @@
       </p:sp>
       <p:sp>
         <p:nvSpPr>
-          <p:cNvPr id="14" name="Shape 11"/>
+          <p:cNvPr id="13" name="Shape 10"/>
           <p:cNvSpPr/>
           <p:nvPr/>
         </p:nvSpPr>
@@ -17399,7 +16970,7 @@
       </p:sp>
       <p:pic>
         <p:nvPicPr>
-          <p:cNvPr id="15" name="Image 1" descr="preencoded.png">    </p:cNvPr>
+          <p:cNvPr id="14" name="Image 1" descr="preencoded.png">    </p:cNvPr>
           <p:cNvPicPr>
             <a:picLocks noChangeAspect="1"/>
           </p:cNvPicPr>
@@ -17423,7 +16994,7 @@
       </p:pic>
       <p:sp>
         <p:nvSpPr>
-          <p:cNvPr id="16" name="Text 12"/>
+          <p:cNvPr id="15" name="Text 11"/>
           <p:cNvSpPr txBox="1"/>
           <p:nvPr/>
         </p:nvSpPr>
@@ -17462,7 +17033,7 @@
       </p:sp>
       <p:sp>
         <p:nvSpPr>
-          <p:cNvPr id="17" name="Text 13"/>
+          <p:cNvPr id="16" name="Text 12"/>
           <p:cNvSpPr txBox="1"/>
           <p:nvPr/>
         </p:nvSpPr>
@@ -17501,7 +17072,7 @@
       </p:sp>
       <p:sp>
         <p:nvSpPr>
-          <p:cNvPr id="18" name="Shape 14"/>
+          <p:cNvPr id="17" name="Shape 13"/>
           <p:cNvSpPr/>
           <p:nvPr/>
         </p:nvSpPr>
@@ -17528,7 +17099,7 @@
       </p:sp>
       <p:sp>
         <p:nvSpPr>
-          <p:cNvPr id="19" name="Shape 15"/>
+          <p:cNvPr id="18" name="Shape 14"/>
           <p:cNvSpPr/>
           <p:nvPr/>
         </p:nvSpPr>
@@ -17555,7 +17126,7 @@
       </p:sp>
       <p:sp>
         <p:nvSpPr>
-          <p:cNvPr id="20" name="Text 16"/>
+          <p:cNvPr id="19" name="Text 15"/>
           <p:cNvSpPr txBox="1"/>
           <p:nvPr/>
         </p:nvSpPr>
@@ -17594,7 +17165,7 @@
       </p:sp>
       <p:sp>
         <p:nvSpPr>
-          <p:cNvPr id="21" name="Shape 17"/>
+          <p:cNvPr id="20" name="Shape 16"/>
           <p:cNvSpPr/>
           <p:nvPr/>
         </p:nvSpPr>
@@ -17628,7 +17199,7 @@
       </p:sp>
       <p:sp>
         <p:nvSpPr>
-          <p:cNvPr id="22" name="Shape 18"/>
+          <p:cNvPr id="21" name="Shape 17"/>
           <p:cNvSpPr/>
           <p:nvPr/>
         </p:nvSpPr>
@@ -17653,7 +17224,7 @@
       </p:sp>
       <p:pic>
         <p:nvPicPr>
-          <p:cNvPr id="23" name="Image 2" descr="preencoded.png">    </p:cNvPr>
+          <p:cNvPr id="22" name="Image 2" descr="preencoded.png">    </p:cNvPr>
           <p:cNvPicPr>
             <a:picLocks noChangeAspect="1"/>
           </p:cNvPicPr>
@@ -17677,7 +17248,7 @@
       </p:pic>
       <p:sp>
         <p:nvSpPr>
-          <p:cNvPr id="24" name="Text 19"/>
+          <p:cNvPr id="23" name="Text 18"/>
           <p:cNvSpPr txBox="1"/>
           <p:nvPr/>
         </p:nvSpPr>
@@ -17716,7 +17287,7 @@
       </p:sp>
       <p:sp>
         <p:nvSpPr>
-          <p:cNvPr id="25" name="Text 20"/>
+          <p:cNvPr id="24" name="Text 19"/>
           <p:cNvSpPr txBox="1"/>
           <p:nvPr/>
         </p:nvSpPr>
@@ -17755,7 +17326,7 @@
       </p:sp>
       <p:sp>
         <p:nvSpPr>
-          <p:cNvPr id="26" name="Shape 21"/>
+          <p:cNvPr id="25" name="Shape 20"/>
           <p:cNvSpPr/>
           <p:nvPr/>
         </p:nvSpPr>
@@ -17782,7 +17353,7 @@
       </p:sp>
       <p:sp>
         <p:nvSpPr>
-          <p:cNvPr id="27" name="Shape 22"/>
+          <p:cNvPr id="26" name="Shape 21"/>
           <p:cNvSpPr/>
           <p:nvPr/>
         </p:nvSpPr>
@@ -17809,7 +17380,7 @@
       </p:sp>
       <p:sp>
         <p:nvSpPr>
-          <p:cNvPr id="28" name="Text 23"/>
+          <p:cNvPr id="27" name="Text 22"/>
           <p:cNvSpPr txBox="1"/>
           <p:nvPr/>
         </p:nvSpPr>
@@ -17848,7 +17419,7 @@
       </p:sp>
       <p:sp>
         <p:nvSpPr>
-          <p:cNvPr id="29" name="Shape 24"/>
+          <p:cNvPr id="28" name="Shape 23"/>
           <p:cNvSpPr/>
           <p:nvPr/>
         </p:nvSpPr>
@@ -17882,7 +17453,7 @@
       </p:sp>
       <p:sp>
         <p:nvSpPr>
-          <p:cNvPr id="30" name="Shape 25"/>
+          <p:cNvPr id="29" name="Shape 24"/>
           <p:cNvSpPr/>
           <p:nvPr/>
         </p:nvSpPr>
@@ -17907,7 +17478,7 @@
       </p:sp>
       <p:pic>
         <p:nvPicPr>
-          <p:cNvPr id="31" name="Image 3" descr="preencoded.png">    </p:cNvPr>
+          <p:cNvPr id="30" name="Image 3" descr="preencoded.png">    </p:cNvPr>
           <p:cNvPicPr>
             <a:picLocks noChangeAspect="1"/>
           </p:cNvPicPr>
@@ -17931,7 +17502,7 @@
       </p:pic>
       <p:sp>
         <p:nvSpPr>
-          <p:cNvPr id="32" name="Text 26"/>
+          <p:cNvPr id="31" name="Text 25"/>
           <p:cNvSpPr txBox="1"/>
           <p:nvPr/>
         </p:nvSpPr>
@@ -17970,7 +17541,7 @@
       </p:sp>
       <p:sp>
         <p:nvSpPr>
-          <p:cNvPr id="33" name="Text 27"/>
+          <p:cNvPr id="32" name="Text 26"/>
           <p:cNvSpPr txBox="1"/>
           <p:nvPr/>
         </p:nvSpPr>
@@ -18009,7 +17580,7 @@
       </p:sp>
       <p:sp>
         <p:nvSpPr>
-          <p:cNvPr id="34" name="Shape 28"/>
+          <p:cNvPr id="33" name="Shape 27"/>
           <p:cNvSpPr/>
           <p:nvPr/>
         </p:nvSpPr>
@@ -18036,7 +17607,7 @@
       </p:sp>
       <p:sp>
         <p:nvSpPr>
-          <p:cNvPr id="35" name="Shape 29"/>
+          <p:cNvPr id="34" name="Shape 28"/>
           <p:cNvSpPr/>
           <p:nvPr/>
         </p:nvSpPr>
@@ -18063,7 +17634,7 @@
       </p:sp>
       <p:sp>
         <p:nvSpPr>
-          <p:cNvPr id="36" name="Text 30"/>
+          <p:cNvPr id="35" name="Text 29"/>
           <p:cNvSpPr txBox="1"/>
           <p:nvPr/>
         </p:nvSpPr>
@@ -18102,7 +17673,7 @@
       </p:sp>
       <p:sp>
         <p:nvSpPr>
-          <p:cNvPr id="37" name="Shape 31"/>
+          <p:cNvPr id="36" name="Shape 30"/>
           <p:cNvSpPr/>
           <p:nvPr/>
         </p:nvSpPr>
@@ -18136,7 +17707,7 @@
       </p:sp>
       <p:sp>
         <p:nvSpPr>
-          <p:cNvPr id="38" name="Shape 32"/>
+          <p:cNvPr id="37" name="Shape 31"/>
           <p:cNvSpPr/>
           <p:nvPr/>
         </p:nvSpPr>
@@ -18161,7 +17732,7 @@
       </p:sp>
       <p:pic>
         <p:nvPicPr>
-          <p:cNvPr id="39" name="Image 4" descr="preencoded.png">    </p:cNvPr>
+          <p:cNvPr id="38" name="Image 4" descr="preencoded.png">    </p:cNvPr>
           <p:cNvPicPr>
             <a:picLocks noChangeAspect="1"/>
           </p:cNvPicPr>
@@ -18185,7 +17756,7 @@
       </p:pic>
       <p:sp>
         <p:nvSpPr>
-          <p:cNvPr id="40" name="Text 33"/>
+          <p:cNvPr id="39" name="Text 32"/>
           <p:cNvSpPr txBox="1"/>
           <p:nvPr/>
         </p:nvSpPr>
@@ -18224,7 +17795,7 @@
       </p:sp>
       <p:sp>
         <p:nvSpPr>
-          <p:cNvPr id="41" name="Text 34"/>
+          <p:cNvPr id="40" name="Text 33"/>
           <p:cNvSpPr txBox="1"/>
           <p:nvPr/>
         </p:nvSpPr>
@@ -18263,7 +17834,7 @@
       </p:sp>
       <p:sp>
         <p:nvSpPr>
-          <p:cNvPr id="42" name="Shape 35"/>
+          <p:cNvPr id="41" name="Shape 34"/>
           <p:cNvSpPr/>
           <p:nvPr/>
         </p:nvSpPr>
@@ -18290,7 +17861,7 @@
       </p:sp>
       <p:sp>
         <p:nvSpPr>
-          <p:cNvPr id="43" name="Shape 36"/>
+          <p:cNvPr id="42" name="Shape 35"/>
           <p:cNvSpPr/>
           <p:nvPr/>
         </p:nvSpPr>
@@ -18317,7 +17888,7 @@
       </p:sp>
       <p:sp>
         <p:nvSpPr>
-          <p:cNvPr id="44" name="Text 37"/>
+          <p:cNvPr id="43" name="Text 36"/>
           <p:cNvSpPr txBox="1"/>
           <p:nvPr/>
         </p:nvSpPr>
@@ -18356,7 +17927,7 @@
       </p:sp>
       <p:sp>
         <p:nvSpPr>
-          <p:cNvPr id="45" name="Shape 38"/>
+          <p:cNvPr id="44" name="Shape 37"/>
           <p:cNvSpPr/>
           <p:nvPr/>
         </p:nvSpPr>
@@ -18390,7 +17961,7 @@
       </p:sp>
       <p:sp>
         <p:nvSpPr>
-          <p:cNvPr id="46" name="Shape 39"/>
+          <p:cNvPr id="45" name="Shape 38"/>
           <p:cNvSpPr/>
           <p:nvPr/>
         </p:nvSpPr>
@@ -18415,7 +17986,7 @@
       </p:sp>
       <p:pic>
         <p:nvPicPr>
-          <p:cNvPr id="47" name="Image 5" descr="preencoded.png">    </p:cNvPr>
+          <p:cNvPr id="46" name="Image 5" descr="preencoded.png">    </p:cNvPr>
           <p:cNvPicPr>
             <a:picLocks noChangeAspect="1"/>
           </p:cNvPicPr>
@@ -18439,7 +18010,7 @@
       </p:pic>
       <p:sp>
         <p:nvSpPr>
-          <p:cNvPr id="48" name="Text 40"/>
+          <p:cNvPr id="47" name="Text 39"/>
           <p:cNvSpPr txBox="1"/>
           <p:nvPr/>
         </p:nvSpPr>
@@ -18478,7 +18049,7 @@
       </p:sp>
       <p:sp>
         <p:nvSpPr>
-          <p:cNvPr id="49" name="Text 41"/>
+          <p:cNvPr id="48" name="Text 40"/>
           <p:cNvSpPr txBox="1"/>
           <p:nvPr/>
         </p:nvSpPr>
@@ -18517,7 +18088,7 @@
       </p:sp>
       <p:sp>
         <p:nvSpPr>
-          <p:cNvPr id="50" name="Shape 42"/>
+          <p:cNvPr id="49" name="Shape 41"/>
           <p:cNvSpPr/>
           <p:nvPr/>
         </p:nvSpPr>
@@ -18544,7 +18115,7 @@
       </p:sp>
       <p:sp>
         <p:nvSpPr>
-          <p:cNvPr id="51" name="Shape 43"/>
+          <p:cNvPr id="50" name="Shape 42"/>
           <p:cNvSpPr/>
           <p:nvPr/>
         </p:nvSpPr>
@@ -18571,7 +18142,7 @@
       </p:sp>
       <p:sp>
         <p:nvSpPr>
-          <p:cNvPr id="52" name="Text 44"/>
+          <p:cNvPr id="51" name="Text 43"/>
           <p:cNvSpPr txBox="1"/>
           <p:nvPr/>
         </p:nvSpPr>
@@ -18610,7 +18181,7 @@
       </p:sp>
       <p:sp>
         <p:nvSpPr>
-          <p:cNvPr id="53" name="Shape 45"/>
+          <p:cNvPr id="52" name="Shape 44"/>
           <p:cNvSpPr/>
           <p:nvPr/>
         </p:nvSpPr>
@@ -18644,7 +18215,7 @@
       </p:sp>
       <p:sp>
         <p:nvSpPr>
-          <p:cNvPr id="54" name="Shape 46"/>
+          <p:cNvPr id="53" name="Shape 45"/>
           <p:cNvSpPr/>
           <p:nvPr/>
         </p:nvSpPr>
@@ -18669,7 +18240,7 @@
       </p:sp>
       <p:pic>
         <p:nvPicPr>
-          <p:cNvPr id="55" name="Image 6" descr="preencoded.png">    </p:cNvPr>
+          <p:cNvPr id="54" name="Image 6" descr="preencoded.png">    </p:cNvPr>
           <p:cNvPicPr>
             <a:picLocks noChangeAspect="1"/>
           </p:cNvPicPr>
@@ -18693,7 +18264,7 @@
       </p:pic>
       <p:sp>
         <p:nvSpPr>
-          <p:cNvPr id="56" name="Text 47"/>
+          <p:cNvPr id="55" name="Text 46"/>
           <p:cNvSpPr txBox="1"/>
           <p:nvPr/>
         </p:nvSpPr>
@@ -18732,7 +18303,7 @@
       </p:sp>
       <p:sp>
         <p:nvSpPr>
-          <p:cNvPr id="57" name="Text 48"/>
+          <p:cNvPr id="56" name="Text 47"/>
           <p:cNvSpPr txBox="1"/>
           <p:nvPr/>
         </p:nvSpPr>
@@ -18771,7 +18342,7 @@
       </p:sp>
       <p:sp>
         <p:nvSpPr>
-          <p:cNvPr id="58" name="Shape 49"/>
+          <p:cNvPr id="57" name="Shape 48"/>
           <p:cNvSpPr/>
           <p:nvPr/>
         </p:nvSpPr>
@@ -18798,7 +18369,7 @@
       </p:sp>
       <p:sp>
         <p:nvSpPr>
-          <p:cNvPr id="59" name="Shape 50"/>
+          <p:cNvPr id="58" name="Shape 49"/>
           <p:cNvSpPr/>
           <p:nvPr/>
         </p:nvSpPr>
@@ -18825,7 +18396,7 @@
       </p:sp>
       <p:sp>
         <p:nvSpPr>
-          <p:cNvPr id="60" name="Text 51"/>
+          <p:cNvPr id="59" name="Text 50"/>
           <p:cNvSpPr txBox="1"/>
           <p:nvPr/>
         </p:nvSpPr>
@@ -18864,7 +18435,7 @@
       </p:sp>
       <p:sp>
         <p:nvSpPr>
-          <p:cNvPr id="61" name="Shape 52"/>
+          <p:cNvPr id="60" name="Shape 51"/>
           <p:cNvSpPr/>
           <p:nvPr/>
         </p:nvSpPr>
@@ -18898,7 +18469,7 @@
       </p:sp>
       <p:sp>
         <p:nvSpPr>
-          <p:cNvPr id="62" name="Shape 53"/>
+          <p:cNvPr id="61" name="Shape 52"/>
           <p:cNvSpPr/>
           <p:nvPr/>
         </p:nvSpPr>
@@ -18923,7 +18494,7 @@
       </p:sp>
       <p:pic>
         <p:nvPicPr>
-          <p:cNvPr id="63" name="Image 7" descr="preencoded.png">    </p:cNvPr>
+          <p:cNvPr id="62" name="Image 7" descr="preencoded.png">    </p:cNvPr>
           <p:cNvPicPr>
             <a:picLocks noChangeAspect="1"/>
           </p:cNvPicPr>
@@ -18947,7 +18518,7 @@
       </p:pic>
       <p:sp>
         <p:nvSpPr>
-          <p:cNvPr id="64" name="Text 54"/>
+          <p:cNvPr id="63" name="Text 53"/>
           <p:cNvSpPr txBox="1"/>
           <p:nvPr/>
         </p:nvSpPr>
@@ -18986,7 +18557,7 @@
       </p:sp>
       <p:sp>
         <p:nvSpPr>
-          <p:cNvPr id="65" name="Text 55"/>
+          <p:cNvPr id="64" name="Text 54"/>
           <p:cNvSpPr txBox="1"/>
           <p:nvPr/>
         </p:nvSpPr>
@@ -19025,7 +18596,7 @@
       </p:sp>
       <p:sp>
         <p:nvSpPr>
-          <p:cNvPr id="66" name="Shape 56"/>
+          <p:cNvPr id="65" name="Shape 55"/>
           <p:cNvSpPr/>
           <p:nvPr/>
         </p:nvSpPr>
@@ -19052,7 +18623,7 @@
       </p:sp>
       <p:sp>
         <p:nvSpPr>
-          <p:cNvPr id="67" name="Shape 57"/>
+          <p:cNvPr id="66" name="Shape 56"/>
           <p:cNvSpPr/>
           <p:nvPr/>
         </p:nvSpPr>
@@ -19079,7 +18650,7 @@
       </p:sp>
       <p:sp>
         <p:nvSpPr>
-          <p:cNvPr id="68" name="Text 58"/>
+          <p:cNvPr id="67" name="Text 57"/>
           <p:cNvSpPr txBox="1"/>
           <p:nvPr/>
         </p:nvSpPr>
@@ -19118,7 +18689,7 @@
       </p:sp>
       <p:sp>
         <p:nvSpPr>
-          <p:cNvPr id="69" name="Shape 59"/>
+          <p:cNvPr id="68" name="Shape 58"/>
           <p:cNvSpPr/>
           <p:nvPr/>
         </p:nvSpPr>
@@ -19152,7 +18723,7 @@
       </p:sp>
       <p:sp>
         <p:nvSpPr>
-          <p:cNvPr id="70" name="Shape 60"/>
+          <p:cNvPr id="69" name="Shape 59"/>
           <p:cNvSpPr/>
           <p:nvPr/>
         </p:nvSpPr>
@@ -19177,7 +18748,7 @@
       </p:sp>
       <p:pic>
         <p:nvPicPr>
-          <p:cNvPr id="71" name="Image 8" descr="preencoded.png">    </p:cNvPr>
+          <p:cNvPr id="70" name="Image 8" descr="preencoded.png">    </p:cNvPr>
           <p:cNvPicPr>
             <a:picLocks noChangeAspect="1"/>
           </p:cNvPicPr>
@@ -19201,7 +18772,7 @@
       </p:pic>
       <p:sp>
         <p:nvSpPr>
-          <p:cNvPr id="72" name="Text 61"/>
+          <p:cNvPr id="71" name="Text 60"/>
           <p:cNvSpPr txBox="1"/>
           <p:nvPr/>
         </p:nvSpPr>
@@ -19240,7 +18811,7 @@
       </p:sp>
       <p:sp>
         <p:nvSpPr>
-          <p:cNvPr id="73" name="Text 62"/>
+          <p:cNvPr id="72" name="Text 61"/>
           <p:cNvSpPr txBox="1"/>
           <p:nvPr/>
         </p:nvSpPr>
@@ -19279,7 +18850,7 @@
       </p:sp>
       <p:sp>
         <p:nvSpPr>
-          <p:cNvPr id="74" name="Shape 63"/>
+          <p:cNvPr id="73" name="Shape 62"/>
           <p:cNvSpPr/>
           <p:nvPr/>
         </p:nvSpPr>
@@ -19306,7 +18877,7 @@
       </p:sp>
       <p:sp>
         <p:nvSpPr>
-          <p:cNvPr id="75" name="Shape 64"/>
+          <p:cNvPr id="74" name="Shape 63"/>
           <p:cNvSpPr/>
           <p:nvPr/>
         </p:nvSpPr>
@@ -19333,7 +18904,7 @@
       </p:sp>
       <p:sp>
         <p:nvSpPr>
-          <p:cNvPr id="76" name="Text 65"/>
+          <p:cNvPr id="75" name="Text 64"/>
           <p:cNvSpPr txBox="1"/>
           <p:nvPr/>
         </p:nvSpPr>
@@ -19372,7 +18943,7 @@
       </p:sp>
       <p:pic>
         <p:nvPicPr>
-          <p:cNvPr id="77" name="Image 9" descr="preencoded.png">    </p:cNvPr>
+          <p:cNvPr id="76" name="Image 9" descr="preencoded.png">    </p:cNvPr>
           <p:cNvPicPr>
             <a:picLocks noChangeAspect="1"/>
           </p:cNvPicPr>
@@ -19396,7 +18967,7 @@
       </p:pic>
       <p:sp>
         <p:nvSpPr>
-          <p:cNvPr id="78" name="Text 66"/>
+          <p:cNvPr id="77" name="Text 65"/>
           <p:cNvSpPr txBox="1"/>
           <p:nvPr/>
         </p:nvSpPr>
